--- a/Slides/Semana 5/semana_5_slides.pptx
+++ b/Slides/Semana 5/semana_5_slides.pptx
@@ -23,9 +23,14 @@
     <p:sldId id="271" r:id="rId17"/>
     <p:sldId id="272" r:id="rId18"/>
     <p:sldId id="273" r:id="rId19"/>
+    <p:sldId id="274" r:id="rId20"/>
+    <p:sldId id="275" r:id="rId21"/>
+    <p:sldId id="276" r:id="rId22"/>
+    <p:sldId id="277" r:id="rId23"/>
+    <p:sldId id="278" r:id="rId24"/>
   </p:sldIdLst>
   <p:notesMasterIdLst>
-    <p:notesMasterId r:id="rId20"/>
+    <p:notesMasterId r:id="rId25"/>
   </p:notesMasterIdLst>
   <p:sldSz cx="12192000" cy="6858000"/>
   <p:notesSz cx="6858000" cy="12192000"/>
@@ -519,7 +524,7 @@
           <a:p>
             <a:r>
               <a:rPr lang="en-US" dirty="0"/>
-              <a:t>Notas: Abertura da mini aula (20 min). Início da Unidade II. Mensagem central no subtítulo: PBR não é um estilo visual, é um modelo matemático de como a luz se comporta. O UV das Semanas 3-4 vira o endereço onde os mapas PBR vão morar. Hoje é também a segunda crítica formal do semestre (fecha C3 - UV, estreia C4 - PBR). Não é tutorial de cliques: é construir o raciocínio "o material é condutor ou dielétrico? qual sua microtextura?".</a:t>
+              <a:t>Notas: Abertura da mini aula (20 min). Semana de transição: fecha a Unidade I revisando o UV a partir do feedback da CF1 e abre a Unidade II com a primeira aproximação a materiais PBR. NÃO há crítica formal nesta semana — é um encontro de ajuste e abertura, sem instrumento de avaliação. A CF1 (Semana 4) já avaliou C3 formalmente; a próxima crítica formal, a CF2, só acontece na Semana 8. Pela primeira vez os estudantes saem do UV Editor e entram no Shader Editor.</a:t>
             </a:r>
             <a:endParaRPr lang="en-US" dirty="0"/>
           </a:p>
@@ -607,7 +612,7 @@
           <a:p>
             <a:r>
               <a:rPr lang="en-US" dirty="0"/>
-              <a:t>Notas: Ao contrário do Metallic, Roughness é genuinamente contínuo. Cuidado com o erro nº 1 de intuição invertida: quem viu tutoriais antigos pode achar "mais roughness = mais brilho". No Metallic/Roughness é o oposto. Manter no quadro: Roughness 0 = espelho | Roughness 1 = fosco.</a:t>
+              <a:t>Notas: Não aprofundar Specular/Glossiness — citar apenas para situar. O importante é a decisão: adotamos Metallic/Roughness porque é o padrão dos motores modernos e o destino do pipeline é a Unity (Semana 16). Menos sujeito a erros físicos.</a:t>
             </a:r>
             <a:endParaRPr lang="en-US" dirty="0"/>
           </a:p>
@@ -695,7 +700,7 @@
           <a:p>
             <a:r>
               <a:rPr lang="en-US" dirty="0"/>
-              <a:t>Notas: Este diagrama é o núcleo procedimental da semana. Repetir verbalmente no estúdio: "condutor ou dielétrico? qual a microtextura?". O GitHub Action converte o bloco mermaid em imagem automaticamente. Cada material do kit deve passar por essas duas perguntas antes de qualquer valor ser digitado.</a:t>
+              <a:t>Notas: Slide de mapa mental. Cada canal é detalhado nos próximos três slides. Escrever no quadro e manter durante toda a aula: "Roughness 0 = espelho | Roughness 1 = fosco". Antecipar que Metallic é binário e Roughness é contínuo.</a:t>
             </a:r>
             <a:endParaRPr lang="en-US" dirty="0"/>
           </a:p>
@@ -783,7 +788,7 @@
           <a:p>
             <a:r>
               <a:rPr lang="en-US" dirty="0"/>
-              <a:t>Notas: Mostrar as 5 referências visuais preparadas e pedir que a turma ESTIME antes de revelar. O exercício de estimativa é mais importante que os valores finais — constrói intuição da escala 0-1. Deixar claro que os valores variam por subtipo (pedra polida vs. bruta) para evitar memorização mecânica.</a:t>
+              <a:t>Notas: Analogia fotográfica útil (do plano): "Albedo é o material fotografado num dia nublado — iluminação difusa, sem sombra nem reflexo." Erro comum observado nesta semana: Albedo extremo. Pedra real não reflete 95% da luz. Usar a referência do moodboard para ancorar o valor.</a:t>
             </a:r>
             <a:endParaRPr lang="en-US" dirty="0"/>
           </a:p>
@@ -871,7 +876,7 @@
           <a:p>
             <a:r>
               <a:rPr lang="en-US" dirty="0"/>
-              <a:t>Notas: Consigna do estúdio (50 min). Reforçar a ligação com o Projeto Integrador e o moodboard: não é "pedra genérica", é AQUELA pedra do kit Medieval/Sci-Fi específico. Nomear os materiais com o material real (ex: pedra_calcaria, aco_enferrujado). Usar esferas (respondem melhor ao reflexo especular) e HDRI neutra no Viewport Rendered.</a:t>
+              <a:t>Notas: Erro mais frequente observado na circulação. O estudante acha que "deixar no meio" é seguro. Valores intermediários só se justificam em regiões de TRANSIÇÃO (ferrugem sobre metal, metal pintado). Estratégia de correção: mostrar ao vivo Metallic 0, 0.5 e 1 com o mesmo Roughness e perguntar "você já viu esse material na vida real?".</a:t>
             </a:r>
             <a:endParaRPr lang="en-US" dirty="0"/>
           </a:p>
@@ -959,7 +964,7 @@
           <a:p>
             <a:r>
               <a:rPr lang="en-US" dirty="0"/>
-              <a:t>Notas: Os três erros mais frequentes da semana, alinhados ao bloco de dificuldades do plano. Circular no estúdio caçando exatamente estes padrões. Para Roughness uniforme, usar a analogia do tato: "de olhos fechados, você distingue madeira de pedra pelo tato — o Roughness é o tato visual".</a:t>
+              <a:t>Notas: Ao contrário do Metallic, Roughness é genuinamente contínuo. Cuidado com o erro de intuição invertida: quem viu tutoriais antigos pode achar "mais roughness = mais brilho". No Metallic/Roughness é o oposto. Manter no quadro: Roughness 0 = espelho | Roughness 1 = fosco.</a:t>
             </a:r>
             <a:endParaRPr lang="en-US" dirty="0"/>
           </a:p>
@@ -1047,7 +1052,7 @@
           <a:p>
             <a:r>
               <a:rPr lang="en-US" dirty="0"/>
-              <a:t>Notas: Contextualizar o valor profissional. PBR deixou de ser opcional na indústria há mais de uma década — hoje é o piso mínimo de qualquer pipeline de material em tempo real. Amarra à CF2 desta semana (C4 avaliado formalmente): a calibração contra referência real que a mini-aula ensinou é literalmente o critério observável da rubrica.</a:t>
+              <a:t>Notas: Este diagrama é o núcleo procedimental da semana. Repetir verbalmente no estúdio: "condutor ou dielétrico? qual a microtextura?". Cada material do kit deve passar por essas duas perguntas antes de qualquer valor ser digitado. Reaproveitado sem alteração — a lógica é a mesma independente de haver ou não crítica formal.</a:t>
             </a:r>
             <a:endParaRPr lang="en-US" dirty="0"/>
           </a:p>
@@ -1135,7 +1140,7 @@
           <a:p>
             <a:r>
               <a:rPr lang="en-US" dirty="0"/>
-              <a:t>Notas: Amarrar a mini aula. Cada item retorna na demonstração e no estúdio. Não reler tudo — apontar a conexão com a demo dos 4 materiais no Principled BSDF. Lembrar que a crítica de hoje é FORMAL: fecha C3 (UV) e estreia C4 (PBR).</a:t>
+              <a:t>Notas: Mostrar as 5 referências visuais preparadas e pedir que a turma ESTIME antes de revelar. O exercício de estimativa é mais importante que os valores finais — constrói intuição da escala 0-1. Deixar claro que os valores variam por subtipo (pedra polida vs. bruta) para evitar memorização mecânica.</a:t>
             </a:r>
             <a:endParaRPr lang="en-US" dirty="0"/>
           </a:p>
@@ -1223,7 +1228,7 @@
           <a:p>
             <a:r>
               <a:rPr lang="en-US" dirty="0"/>
-              <a:t>Notas: Preparar a turma para o segundo encontro. Autoavaliação entregue ANTES da aula. Protocolo: o apresentador fala primeiro, a turma observa, depois abre. Selecionar 3-4 trabalhos que cubram o espectro. Vocabulário técnico esperado: condutor/dielétrico, microgranularidade.</a:t>
+              <a:t>Notas: Consigna do estúdio (Encontro 1, 50 min). Etapa 1: reabrir o Hero Asset com o feedback da CF1, reativar Stretch Overlay, aplicar Average Islands Scale/Pack Islands, salvar `[Nome]_HeroAsset_UV_Semana05.blend`. Etapa 2: criar 2-4 materiais no Principled BSDF com valores de referência real, aplicar um deles (valores planos) ao Hero Asset já com UV revisado, salvar `[Nome]_MateriaisPBR_Semana05.blend`. Circular perguntando: "O que a CF1 apontou nesse UV? Mostra onde corrigiu." e "Esse material é condutor ou dielétrico?".</a:t>
             </a:r>
             <a:endParaRPr lang="en-US" dirty="0"/>
           </a:p>
@@ -1311,8 +1316,449 @@
           <a:p>
             <a:r>
               <a:rPr lang="en-US" dirty="0"/>
-              <a:t>Notas: Transição para a demonstração de 20 min. Layout dividido: Viewport Rendered com HDRI neutra à esquerda, Shader Editor à direita. Sequência: metal (Metallic 1, Rough 0.05) -&gt; plástico (Metallic 0) -&gt; pedra (Rough 0.85) -&gt; madeira. Mostrar Metallic 0/0.5/1 no plástico. Rotacionar a HDRI no fim para provar a consistência. Manter o arquivo aberto durante o estúdio como âncora.
+              <a:t>Notas: Quatro erros mais frequentes da semana, alinhados ao bloco de dificuldades do plano. Circular no estúdio caçando exatamente estes padrões. Para Roughness uniforme, usar a analogia do tato: "de olhos fechados, você distingue madeira de pedra pelo tato — o Roughness é o tato visual".</a:t>
+            </a:r>
+            <a:endParaRPr lang="en-US" dirty="0"/>
+          </a:p>
+        </p:txBody>
+      </p:sp>
+      <p:sp>
+        <p:nvSpPr>
+          <p:cNvPr id="4" name="Slide Number Placeholder 3"/>
+          <p:cNvSpPr>
+            <a:spLocks noGrp="1"/>
+          </p:cNvSpPr>
+          <p:nvPr>
+            <p:ph type="sldNum" sz="quarter" idx="10"/>
+          </p:nvPr>
+        </p:nvSpPr>
+        <p:spPr/>
+        <p:txBody>
+          <a:bodyPr/>
+          <a:lstStyle/>
+          <a:p>
+            <a:fld id="{F7021451-1387-4CA6-816F-3879F97B5CBC}" type="slidenum">
+              <a:rPr lang="en-US"/>
+              <a:t>18</a:t>
+            </a:fld>
+            <a:endParaRPr lang="en-US"/>
+          </a:p>
+        </p:txBody>
+      </p:sp>
+    </p:spTree>
+    <p:extLst>
+      <p:ext uri="{BB962C8B-B14F-4D97-AF65-F5344CB8AC3E}">
+        <p14:creationId xmlns:p14="http://schemas.microsoft.com/office/powerpoint/2010/main" val="1024086991"/>
+      </p:ext>
+    </p:extLst>
+  </p:cSld>
+  <p:clrMapOvr>
+    <a:masterClrMapping/>
+  </p:clrMapOvr>
+</p:notes>
+</file>
+
+<file path=ppt/notesSlides/notesSlide19.xml><?xml version="1.0" encoding="utf-8"?>
+<p:notes xmlns:a="http://schemas.openxmlformats.org/drawingml/2006/main" xmlns:r="http://schemas.openxmlformats.org/officeDocument/2006/relationships" xmlns:p="http://schemas.openxmlformats.org/presentationml/2006/main">
+  <p:cSld>
+    <p:spTree>
+      <p:nvGrpSpPr>
+        <p:cNvPr id="1" name=""/>
+        <p:cNvGrpSpPr/>
+        <p:nvPr/>
+      </p:nvGrpSpPr>
+      <p:grpSpPr>
+        <a:xfrm>
+          <a:off x="0" y="0"/>
+          <a:ext cx="0" cy="0"/>
+          <a:chOff x="0" y="0"/>
+          <a:chExt cx="0" cy="0"/>
+        </a:xfrm>
+      </p:grpSpPr>
+      <p:sp>
+        <p:nvSpPr>
+          <p:cNvPr id="2" name="Slide Image Placeholder 1"/>
+          <p:cNvSpPr>
+            <a:spLocks noGrp="1" noRot="1" noChangeAspect="1"/>
+          </p:cNvSpPr>
+          <p:nvPr>
+            <p:ph type="sldImg"/>
+          </p:nvPr>
+        </p:nvSpPr>
+        <p:spPr/>
+      </p:sp>
+      <p:sp>
+        <p:nvSpPr>
+          <p:cNvPr id="3" name="Notes Placeholder 2"/>
+          <p:cNvSpPr>
+            <a:spLocks noGrp="1"/>
+          </p:cNvSpPr>
+          <p:nvPr>
+            <p:ph type="body" idx="1"/>
+          </p:nvPr>
+        </p:nvSpPr>
+        <p:spPr/>
+        <p:txBody>
+          <a:bodyPr/>
+          <a:lstStyle/>
+          <a:p>
+            <a:r>
+              <a:rPr lang="en-US" dirty="0"/>
+              <a:t>Notas: Contextualizar o valor profissional. PBR deixou de ser opcional na indústria há mais de uma década — hoje é o piso mínimo de qualquer pipeline de material em tempo real. A calibração contra referência real que a mini-aula ensinou hoje é observada informalmente e volta a ser cobrada formalmente na CF2 (Semana 8), já com textura real e dentro do 3D Coat.</a:t>
+            </a:r>
+            <a:endParaRPr lang="en-US" dirty="0"/>
+          </a:p>
+        </p:txBody>
+      </p:sp>
+      <p:sp>
+        <p:nvSpPr>
+          <p:cNvPr id="4" name="Slide Number Placeholder 3"/>
+          <p:cNvSpPr>
+            <a:spLocks noGrp="1"/>
+          </p:cNvSpPr>
+          <p:nvPr>
+            <p:ph type="sldNum" sz="quarter" idx="10"/>
+          </p:nvPr>
+        </p:nvSpPr>
+        <p:spPr/>
+        <p:txBody>
+          <a:bodyPr/>
+          <a:lstStyle/>
+          <a:p>
+            <a:fld id="{F7021451-1387-4CA6-816F-3879F97B5CBC}" type="slidenum">
+              <a:rPr lang="en-US"/>
+              <a:t>19</a:t>
+            </a:fld>
+            <a:endParaRPr lang="en-US"/>
+          </a:p>
+        </p:txBody>
+      </p:sp>
+    </p:spTree>
+    <p:extLst>
+      <p:ext uri="{BB962C8B-B14F-4D97-AF65-F5344CB8AC3E}">
+        <p14:creationId xmlns:p14="http://schemas.microsoft.com/office/powerpoint/2010/main" val="1024086991"/>
+      </p:ext>
+    </p:extLst>
+  </p:cSld>
+  <p:clrMapOvr>
+    <a:masterClrMapping/>
+  </p:clrMapOvr>
+</p:notes>
+</file>
+
+<file path=ppt/notesSlides/notesSlide2.xml><?xml version="1.0" encoding="utf-8"?>
+<p:notes xmlns:a="http://schemas.openxmlformats.org/drawingml/2006/main" xmlns:r="http://schemas.openxmlformats.org/officeDocument/2006/relationships" xmlns:p="http://schemas.openxmlformats.org/presentationml/2006/main">
+  <p:cSld>
+    <p:spTree>
+      <p:nvGrpSpPr>
+        <p:cNvPr id="1" name=""/>
+        <p:cNvGrpSpPr/>
+        <p:nvPr/>
+      </p:nvGrpSpPr>
+      <p:grpSpPr>
+        <a:xfrm>
+          <a:off x="0" y="0"/>
+          <a:ext cx="0" cy="0"/>
+          <a:chOff x="0" y="0"/>
+          <a:chExt cx="0" cy="0"/>
+        </a:xfrm>
+      </p:grpSpPr>
+      <p:sp>
+        <p:nvSpPr>
+          <p:cNvPr id="2" name="Slide Image Placeholder 1"/>
+          <p:cNvSpPr>
+            <a:spLocks noGrp="1" noRot="1" noChangeAspect="1"/>
+          </p:cNvSpPr>
+          <p:nvPr>
+            <p:ph type="sldImg"/>
+          </p:nvPr>
+        </p:nvSpPr>
+        <p:spPr/>
+      </p:sp>
+      <p:sp>
+        <p:nvSpPr>
+          <p:cNvPr id="3" name="Notes Placeholder 2"/>
+          <p:cNvSpPr>
+            <a:spLocks noGrp="1"/>
+          </p:cNvSpPr>
+          <p:nvPr>
+            <p:ph type="body" idx="1"/>
+          </p:nvPr>
+        </p:nvSpPr>
+        <p:spPr/>
+        <p:txBody>
+          <a:bodyPr/>
+          <a:lstStyle/>
+          <a:p>
+            <a:r>
+              <a:rPr lang="en-US" dirty="0"/>
+              <a:t>Notas: Ler rápido. Os dois primeiros objetivos fecham a Unidade I (UV); os demais abrem a Unidade II (PBR). Não há nota nesta semana — o professor observa C1, C3 e C4 informalmente, alimentando o acompanhamento que será avaliado formalmente na CF2 (Semana 8). Não antecipar texturas seamless (Semana 6) nem Normal Map (Semana 7): o foco de hoje é o valor plano.</a:t>
+            </a:r>
+            <a:endParaRPr lang="en-US" dirty="0"/>
+          </a:p>
+        </p:txBody>
+      </p:sp>
+      <p:sp>
+        <p:nvSpPr>
+          <p:cNvPr id="4" name="Slide Number Placeholder 3"/>
+          <p:cNvSpPr>
+            <a:spLocks noGrp="1"/>
+          </p:cNvSpPr>
+          <p:nvPr>
+            <p:ph type="sldNum" sz="quarter" idx="10"/>
+          </p:nvPr>
+        </p:nvSpPr>
+        <p:spPr/>
+        <p:txBody>
+          <a:bodyPr/>
+          <a:lstStyle/>
+          <a:p>
+            <a:fld id="{F7021451-1387-4CA6-816F-3879F97B5CBC}" type="slidenum">
+              <a:rPr lang="en-US"/>
+              <a:t>2</a:t>
+            </a:fld>
+            <a:endParaRPr lang="en-US"/>
+          </a:p>
+        </p:txBody>
+      </p:sp>
+    </p:spTree>
+    <p:extLst>
+      <p:ext uri="{BB962C8B-B14F-4D97-AF65-F5344CB8AC3E}">
+        <p14:creationId xmlns:p14="http://schemas.microsoft.com/office/powerpoint/2010/main" val="1024086991"/>
+      </p:ext>
+    </p:extLst>
+  </p:cSld>
+  <p:clrMapOvr>
+    <a:masterClrMapping/>
+  </p:clrMapOvr>
+</p:notes>
+</file>
+
+<file path=ppt/notesSlides/notesSlide20.xml><?xml version="1.0" encoding="utf-8"?>
+<p:notes xmlns:a="http://schemas.openxmlformats.org/drawingml/2006/main" xmlns:r="http://schemas.openxmlformats.org/officeDocument/2006/relationships" xmlns:p="http://schemas.openxmlformats.org/presentationml/2006/main">
+  <p:cSld>
+    <p:spTree>
+      <p:nvGrpSpPr>
+        <p:cNvPr id="1" name=""/>
+        <p:cNvGrpSpPr/>
+        <p:nvPr/>
+      </p:nvGrpSpPr>
+      <p:grpSpPr>
+        <a:xfrm>
+          <a:off x="0" y="0"/>
+          <a:ext cx="0" cy="0"/>
+          <a:chOff x="0" y="0"/>
+          <a:chExt cx="0" cy="0"/>
+        </a:xfrm>
+      </p:grpSpPr>
+      <p:sp>
+        <p:nvSpPr>
+          <p:cNvPr id="2" name="Slide Image Placeholder 1"/>
+          <p:cNvSpPr>
+            <a:spLocks noGrp="1" noRot="1" noChangeAspect="1"/>
+          </p:cNvSpPr>
+          <p:nvPr>
+            <p:ph type="sldImg"/>
+          </p:nvPr>
+        </p:nvSpPr>
+        <p:spPr/>
+      </p:sp>
+      <p:sp>
+        <p:nvSpPr>
+          <p:cNvPr id="3" name="Notes Placeholder 2"/>
+          <p:cNvSpPr>
+            <a:spLocks noGrp="1"/>
+          </p:cNvSpPr>
+          <p:nvPr>
+            <p:ph type="body" idx="1"/>
+          </p:nvPr>
+        </p:nvSpPr>
+        <p:spPr/>
+        <p:txBody>
+          <a:bodyPr/>
+          <a:lstStyle/>
+          <a:p>
+            <a:r>
+              <a:rPr lang="en-US" dirty="0"/>
+              <a:t>Notas: Amarrar a mini aula. Cada item retorna na demonstração e no estúdio. Não reler tudo — apontar a conexão com a demo dos materiais no Principled BSDF. Não há crítica formal hoje: as observações de C1, C3 e C4 alimentam o acompanhamento informal até a CF2, na Semana 8.</a:t>
+            </a:r>
+            <a:endParaRPr lang="en-US" dirty="0"/>
+          </a:p>
+        </p:txBody>
+      </p:sp>
+      <p:sp>
+        <p:nvSpPr>
+          <p:cNvPr id="4" name="Slide Number Placeholder 3"/>
+          <p:cNvSpPr>
+            <a:spLocks noGrp="1"/>
+          </p:cNvSpPr>
+          <p:nvPr>
+            <p:ph type="sldNum" sz="quarter" idx="10"/>
+          </p:nvPr>
+        </p:nvSpPr>
+        <p:spPr/>
+        <p:txBody>
+          <a:bodyPr/>
+          <a:lstStyle/>
+          <a:p>
+            <a:fld id="{F7021451-1387-4CA6-816F-3879F97B5CBC}" type="slidenum">
+              <a:rPr lang="en-US"/>
+              <a:t>20</a:t>
+            </a:fld>
+            <a:endParaRPr lang="en-US"/>
+          </a:p>
+        </p:txBody>
+      </p:sp>
+    </p:spTree>
+    <p:extLst>
+      <p:ext uri="{BB962C8B-B14F-4D97-AF65-F5344CB8AC3E}">
+        <p14:creationId xmlns:p14="http://schemas.microsoft.com/office/powerpoint/2010/main" val="1024086991"/>
+      </p:ext>
+    </p:extLst>
+  </p:cSld>
+  <p:clrMapOvr>
+    <a:masterClrMapping/>
+  </p:clrMapOvr>
+</p:notes>
+</file>
+
+<file path=ppt/notesSlides/notesSlide21.xml><?xml version="1.0" encoding="utf-8"?>
+<p:notes xmlns:a="http://schemas.openxmlformats.org/drawingml/2006/main" xmlns:r="http://schemas.openxmlformats.org/officeDocument/2006/relationships" xmlns:p="http://schemas.openxmlformats.org/presentationml/2006/main">
+  <p:cSld>
+    <p:spTree>
+      <p:nvGrpSpPr>
+        <p:cNvPr id="1" name=""/>
+        <p:cNvGrpSpPr/>
+        <p:nvPr/>
+      </p:nvGrpSpPr>
+      <p:grpSpPr>
+        <a:xfrm>
+          <a:off x="0" y="0"/>
+          <a:ext cx="0" cy="0"/>
+          <a:chOff x="0" y="0"/>
+          <a:chExt cx="0" cy="0"/>
+        </a:xfrm>
+      </p:grpSpPr>
+      <p:sp>
+        <p:nvSpPr>
+          <p:cNvPr id="2" name="Slide Image Placeholder 1"/>
+          <p:cNvSpPr>
+            <a:spLocks noGrp="1" noRot="1" noChangeAspect="1"/>
+          </p:cNvSpPr>
+          <p:nvPr>
+            <p:ph type="sldImg"/>
+          </p:nvPr>
+        </p:nvSpPr>
+        <p:spPr/>
+      </p:sp>
+      <p:sp>
+        <p:nvSpPr>
+          <p:cNvPr id="3" name="Notes Placeholder 2"/>
+          <p:cNvSpPr>
+            <a:spLocks noGrp="1"/>
+          </p:cNvSpPr>
+          <p:nvPr>
+            <p:ph type="body" idx="1"/>
+          </p:nvPr>
+        </p:nvSpPr>
+        <p:spPr/>
+        <p:txBody>
+          <a:bodyPr/>
+          <a:lstStyle/>
+          <a:p>
+            <a:r>
+              <a:rPr lang="en-US" dirty="0"/>
+              <a:t>Notas: Abertura do Encontro 2 (15 min). Roteiro: (5 min) mostrar exemplos projetados de UV e material bem calibrados; (5 min) nomear o erro mais comum observado (tipicamente Metallic 0.5, Albedo muito claro, Roughness igual); (5 min) pergunta aberta a 2-3 voluntários — "Qual bloco foi mais difícil hoje, o UV ou o PBR? Por quê?" — sem registro formal.</a:t>
+            </a:r>
+            <a:endParaRPr lang="en-US" dirty="0"/>
+          </a:p>
+        </p:txBody>
+      </p:sp>
+      <p:sp>
+        <p:nvSpPr>
+          <p:cNvPr id="4" name="Slide Number Placeholder 3"/>
+          <p:cNvSpPr>
+            <a:spLocks noGrp="1"/>
+          </p:cNvSpPr>
+          <p:nvPr>
+            <p:ph type="sldNum" sz="quarter" idx="10"/>
+          </p:nvPr>
+        </p:nvSpPr>
+        <p:spPr/>
+        <p:txBody>
+          <a:bodyPr/>
+          <a:lstStyle/>
+          <a:p>
+            <a:fld id="{F7021451-1387-4CA6-816F-3879F97B5CBC}" type="slidenum">
+              <a:rPr lang="en-US"/>
+              <a:t>21</a:t>
+            </a:fld>
+            <a:endParaRPr lang="en-US"/>
+          </a:p>
+        </p:txBody>
+      </p:sp>
+    </p:spTree>
+    <p:extLst>
+      <p:ext uri="{BB962C8B-B14F-4D97-AF65-F5344CB8AC3E}">
+        <p14:creationId xmlns:p14="http://schemas.microsoft.com/office/powerpoint/2010/main" val="1024086991"/>
+      </p:ext>
+    </p:extLst>
+  </p:cSld>
+  <p:clrMapOvr>
+    <a:masterClrMapping/>
+  </p:clrMapOvr>
+</p:notes>
+</file>
+
+<file path=ppt/notesSlides/notesSlide22.xml><?xml version="1.0" encoding="utf-8"?>
+<p:notes xmlns:a="http://schemas.openxmlformats.org/drawingml/2006/main" xmlns:r="http://schemas.openxmlformats.org/officeDocument/2006/relationships" xmlns:p="http://schemas.openxmlformats.org/presentationml/2006/main">
+  <p:cSld>
+    <p:spTree>
+      <p:nvGrpSpPr>
+        <p:cNvPr id="1" name=""/>
+        <p:cNvGrpSpPr/>
+        <p:nvPr/>
+      </p:nvGrpSpPr>
+      <p:grpSpPr>
+        <a:xfrm>
+          <a:off x="0" y="0"/>
+          <a:ext cx="0" cy="0"/>
+          <a:chOff x="0" y="0"/>
+          <a:chExt cx="0" cy="0"/>
+        </a:xfrm>
+      </p:grpSpPr>
+      <p:sp>
+        <p:nvSpPr>
+          <p:cNvPr id="2" name="Slide Image Placeholder 1"/>
+          <p:cNvSpPr>
+            <a:spLocks noGrp="1" noRot="1" noChangeAspect="1"/>
+          </p:cNvSpPr>
+          <p:nvPr>
+            <p:ph type="sldImg"/>
+          </p:nvPr>
+        </p:nvSpPr>
+        <p:spPr/>
+      </p:sp>
+      <p:sp>
+        <p:nvSpPr>
+          <p:cNvPr id="3" name="Notes Placeholder 2"/>
+          <p:cNvSpPr>
+            <a:spLocks noGrp="1"/>
+          </p:cNvSpPr>
+          <p:nvPr>
+            <p:ph type="body" idx="1"/>
+          </p:nvPr>
+        </p:nvSpPr>
+        <p:spPr/>
+        <p:txBody>
+          <a:bodyPr/>
+          <a:lstStyle/>
+          <a:p>
+            <a:r>
+              <a:rPr lang="en-US" dirty="0"/>
+              <a:t>Notas: Transição para a demonstração de 20 min (5 min de UV + 15 min de PBR). Layout dividido: Viewport Rendered com HDRI neutra à esquerda, Shader Editor à direita. Sequência: metal (Metallic 1, Rough 0.05) -&gt; plástico (Metallic 0) -&gt; pedra (Rough 0.85) -&gt; madeira. Mostrar Metallic 0/0.5/1 no plástico. Rotacionar a HDRI no fim para provar a consistência. Manter os dois arquivos de demonstração (UV e materiais) abertos durante o estúdio como âncora.
 [!FIGURA]
+Este arquivo ainda não existe em assets/ — precisa ser produzido antes da aula.
 Objetivo didático: dar à turma um alvo visual do resultado esperado e antecipar o layout de tela da demonstração.
 Arquivo sugerido: assets/demo_4_materiais_pbr.webp
 Descrição: captura do Blender com quatro esferas lado a lado em Viewport Rendered sob HDRI neutra — metal polido (reflexo nítido), plástico vermelho brilhante, pedra bege fosca e madeira marrom. Ao lado, o Shader Editor mostrando um Principled BSDF conectado ao Material Output.
@@ -1339,7 +1785,7 @@
           <a:p>
             <a:fld id="{F7021451-1387-4CA6-816F-3879F97B5CBC}" type="slidenum">
               <a:rPr lang="en-US"/>
-              <a:t>18</a:t>
+              <a:t>22</a:t>
             </a:fld>
             <a:endParaRPr lang="en-US"/>
           </a:p>
@@ -1358,7 +1804,7 @@
 </p:notes>
 </file>
 
-<file path=ppt/notesSlides/notesSlide2.xml><?xml version="1.0" encoding="utf-8"?>
+<file path=ppt/notesSlides/notesSlide23.xml><?xml version="1.0" encoding="utf-8"?>
 <p:notes xmlns:a="http://schemas.openxmlformats.org/drawingml/2006/main" xmlns:r="http://schemas.openxmlformats.org/officeDocument/2006/relationships" xmlns:p="http://schemas.openxmlformats.org/presentationml/2006/main">
   <p:cSld>
     <p:spTree>
@@ -1404,7 +1850,7 @@
           <a:p>
             <a:r>
               <a:rPr lang="en-US" dirty="0"/>
-              <a:t>Notas: Ler rápido. Cada objetivo retorna ao longo da aula. Não antecipar texturas seamless (Semana 6) nem Normal Map (Semana 7). O foco é o valor plano: propriedade física da superfície, ainda sem imagem no canal.</a:t>
+              <a:t>Notas: Fechamento (10 min). Síntese técnica (2 min): "se a resposta for não, o material vai parecer falso, independentemente de quanto detalhe você pintar por cima." Reflexão de processo (3 min): perguntar a 2-3 voluntários qual material foi mais difícil de calibrar e por quê. Confirmação das entregas (2 min): Hero Asset com UV revisado, materiais PBR de teste (v1 e v2 pós-circulação), Hero Asset com material PBR aplicado, screenshots — recapitular nomenclatura esperada.</a:t>
             </a:r>
             <a:endParaRPr lang="en-US" dirty="0"/>
           </a:p>
@@ -1427,7 +1873,7 @@
           <a:p>
             <a:fld id="{F7021451-1387-4CA6-816F-3879F97B5CBC}" type="slidenum">
               <a:rPr lang="en-US"/>
-              <a:t>2</a:t>
+              <a:t>23</a:t>
             </a:fld>
             <a:endParaRPr lang="en-US"/>
           </a:p>
@@ -1492,7 +1938,7 @@
           <a:p>
             <a:r>
               <a:rPr lang="en-US" dirty="0"/>
-              <a:t>Notas: Abrir com esta pergunta. Aguardar 2-3 respostas (vão citar: pintar highlight na textura, mapa especular, ajustar no motor). Confirmar que todas estavam certas — e então mostrar o problema no próximo slide: highlight embutido só funciona com a luz no ângulo certo.</a:t>
+              <a:t>Notas: Parte 1 da mini aula (~8 min). Objetivo: relembrar Stretch Overlay, texel density e Pack Islands o suficiente para que os estudantes ajam sobre o feedback da CF1 sem precisar de uma aula nova. Abrir dizendo: "Vocês já viram tudo isso na Semana 4. Hoje não é aula nova de UV — é a correção do que a crítica formal apontou."</a:t>
             </a:r>
             <a:endParaRPr lang="en-US" dirty="0"/>
           </a:p>
@@ -1580,8 +2026,363 @@
           <a:p>
             <a:r>
               <a:rPr lang="en-US" dirty="0"/>
+              <a:t>Notas: Revisão no quadro/projetor, não uma aula nova. Serve apenas para destravar a correção guiada pelo feedback já recebido. Estudantes que trabalharam em outros softwares podem confundir intuições — reforçar verbalmente a leitura das cores do Stretch Overlay.</a:t>
+            </a:r>
+            <a:endParaRPr lang="en-US" dirty="0"/>
+          </a:p>
+        </p:txBody>
+      </p:sp>
+      <p:sp>
+        <p:nvSpPr>
+          <p:cNvPr id="4" name="Slide Number Placeholder 3"/>
+          <p:cNvSpPr>
+            <a:spLocks noGrp="1"/>
+          </p:cNvSpPr>
+          <p:nvPr>
+            <p:ph type="sldNum" sz="quarter" idx="10"/>
+          </p:nvPr>
+        </p:nvSpPr>
+        <p:spPr/>
+        <p:txBody>
+          <a:bodyPr/>
+          <a:lstStyle/>
+          <a:p>
+            <a:fld id="{F7021451-1387-4CA6-816F-3879F97B5CBC}" type="slidenum">
+              <a:rPr lang="en-US"/>
+              <a:t>4</a:t>
+            </a:fld>
+            <a:endParaRPr lang="en-US"/>
+          </a:p>
+        </p:txBody>
+      </p:sp>
+    </p:spTree>
+    <p:extLst>
+      <p:ext uri="{BB962C8B-B14F-4D97-AF65-F5344CB8AC3E}">
+        <p14:creationId xmlns:p14="http://schemas.microsoft.com/office/powerpoint/2010/main" val="1024086991"/>
+      </p:ext>
+    </p:extLst>
+  </p:cSld>
+  <p:clrMapOvr>
+    <a:masterClrMapping/>
+  </p:clrMapOvr>
+</p:notes>
+</file>
+
+<file path=ppt/notesSlides/notesSlide5.xml><?xml version="1.0" encoding="utf-8"?>
+<p:notes xmlns:a="http://schemas.openxmlformats.org/drawingml/2006/main" xmlns:r="http://schemas.openxmlformats.org/officeDocument/2006/relationships" xmlns:p="http://schemas.openxmlformats.org/presentationml/2006/main">
+  <p:cSld>
+    <p:spTree>
+      <p:nvGrpSpPr>
+        <p:cNvPr id="1" name=""/>
+        <p:cNvGrpSpPr/>
+        <p:nvPr/>
+      </p:nvGrpSpPr>
+      <p:grpSpPr>
+        <a:xfrm>
+          <a:off x="0" y="0"/>
+          <a:ext cx="0" cy="0"/>
+          <a:chOff x="0" y="0"/>
+          <a:chExt cx="0" cy="0"/>
+        </a:xfrm>
+      </p:grpSpPr>
+      <p:sp>
+        <p:nvSpPr>
+          <p:cNvPr id="2" name="Slide Image Placeholder 1"/>
+          <p:cNvSpPr>
+            <a:spLocks noGrp="1" noRot="1" noChangeAspect="1"/>
+          </p:cNvSpPr>
+          <p:nvPr>
+            <p:ph type="sldImg"/>
+          </p:nvPr>
+        </p:nvSpPr>
+        <p:spPr/>
+      </p:sp>
+      <p:sp>
+        <p:nvSpPr>
+          <p:cNvPr id="3" name="Notes Placeholder 2"/>
+          <p:cNvSpPr>
+            <a:spLocks noGrp="1"/>
+          </p:cNvSpPr>
+          <p:nvPr>
+            <p:ph type="body" idx="1"/>
+          </p:nvPr>
+        </p:nvSpPr>
+        <p:spPr/>
+        <p:txBody>
+          <a:bodyPr/>
+          <a:lstStyle/>
+          <a:p>
+            <a:r>
+              <a:rPr lang="en-US" dirty="0"/>
+              <a:t>Notas: Slide conceitual de apoio à correção ao vivo (Demonstração Parte 1, ~5 min): abrir um arquivo de prática com distorção evidente, aplicar Average Islands Scale e Pack Islands, comparar antes/depois. "Isso é exatamente o que vocês vão fazer com o feedback da própria CF1 daqui a pouco."
+[!FIGURA]
+Não existe hoje um arquivo de imagem para este slide — mantido texto-somente. Se for produzida uma nova figura, um bom candidato é um par de capturas de Stretch Overlay lado a lado (antes da correção / depois da correção) do mesmo asset, para reforçar visualmente a comparação.</a:t>
+            </a:r>
+            <a:endParaRPr lang="en-US" dirty="0"/>
+          </a:p>
+        </p:txBody>
+      </p:sp>
+      <p:sp>
+        <p:nvSpPr>
+          <p:cNvPr id="4" name="Slide Number Placeholder 3"/>
+          <p:cNvSpPr>
+            <a:spLocks noGrp="1"/>
+          </p:cNvSpPr>
+          <p:nvPr>
+            <p:ph type="sldNum" sz="quarter" idx="10"/>
+          </p:nvPr>
+        </p:nvSpPr>
+        <p:spPr/>
+        <p:txBody>
+          <a:bodyPr/>
+          <a:lstStyle/>
+          <a:p>
+            <a:fld id="{F7021451-1387-4CA6-816F-3879F97B5CBC}" type="slidenum">
+              <a:rPr lang="en-US"/>
+              <a:t>5</a:t>
+            </a:fld>
+            <a:endParaRPr lang="en-US"/>
+          </a:p>
+        </p:txBody>
+      </p:sp>
+    </p:spTree>
+    <p:extLst>
+      <p:ext uri="{BB962C8B-B14F-4D97-AF65-F5344CB8AC3E}">
+        <p14:creationId xmlns:p14="http://schemas.microsoft.com/office/powerpoint/2010/main" val="1024086991"/>
+      </p:ext>
+    </p:extLst>
+  </p:cSld>
+  <p:clrMapOvr>
+    <a:masterClrMapping/>
+  </p:clrMapOvr>
+</p:notes>
+</file>
+
+<file path=ppt/notesSlides/notesSlide6.xml><?xml version="1.0" encoding="utf-8"?>
+<p:notes xmlns:a="http://schemas.openxmlformats.org/drawingml/2006/main" xmlns:r="http://schemas.openxmlformats.org/officeDocument/2006/relationships" xmlns:p="http://schemas.openxmlformats.org/presentationml/2006/main">
+  <p:cSld>
+    <p:spTree>
+      <p:nvGrpSpPr>
+        <p:cNvPr id="1" name=""/>
+        <p:cNvGrpSpPr/>
+        <p:nvPr/>
+      </p:nvGrpSpPr>
+      <p:grpSpPr>
+        <a:xfrm>
+          <a:off x="0" y="0"/>
+          <a:ext cx="0" cy="0"/>
+          <a:chOff x="0" y="0"/>
+          <a:chExt cx="0" cy="0"/>
+        </a:xfrm>
+      </p:grpSpPr>
+      <p:sp>
+        <p:nvSpPr>
+          <p:cNvPr id="2" name="Slide Image Placeholder 1"/>
+          <p:cNvSpPr>
+            <a:spLocks noGrp="1" noRot="1" noChangeAspect="1"/>
+          </p:cNvSpPr>
+          <p:nvPr>
+            <p:ph type="sldImg"/>
+          </p:nvPr>
+        </p:nvSpPr>
+        <p:spPr/>
+      </p:sp>
+      <p:sp>
+        <p:nvSpPr>
+          <p:cNvPr id="3" name="Notes Placeholder 2"/>
+          <p:cNvSpPr>
+            <a:spLocks noGrp="1"/>
+          </p:cNvSpPr>
+          <p:nvPr>
+            <p:ph type="body" idx="1"/>
+          </p:nvPr>
+        </p:nvSpPr>
+        <p:spPr/>
+        <p:txBody>
+          <a:bodyPr/>
+          <a:lstStyle/>
+          <a:p>
+            <a:r>
+              <a:rPr lang="en-US" dirty="0"/>
+              <a:t>Notas: Parte 2 da mini aula (~12 min). Objetivo: criar o entendimento de que PBR não é um estilo visual, mas um modelo matemático de como a luz se comporta ao tocar superfícies. O UV revisado agora é o endereço onde os mapas PBR das próximas semanas vão morar.</a:t>
+            </a:r>
+            <a:endParaRPr lang="en-US" dirty="0"/>
+          </a:p>
+        </p:txBody>
+      </p:sp>
+      <p:sp>
+        <p:nvSpPr>
+          <p:cNvPr id="4" name="Slide Number Placeholder 3"/>
+          <p:cNvSpPr>
+            <a:spLocks noGrp="1"/>
+          </p:cNvSpPr>
+          <p:nvPr>
+            <p:ph type="sldNum" sz="quarter" idx="10"/>
+          </p:nvPr>
+        </p:nvSpPr>
+        <p:spPr/>
+        <p:txBody>
+          <a:bodyPr/>
+          <a:lstStyle/>
+          <a:p>
+            <a:fld id="{F7021451-1387-4CA6-816F-3879F97B5CBC}" type="slidenum">
+              <a:rPr lang="en-US"/>
+              <a:t>6</a:t>
+            </a:fld>
+            <a:endParaRPr lang="en-US"/>
+          </a:p>
+        </p:txBody>
+      </p:sp>
+    </p:spTree>
+    <p:extLst>
+      <p:ext uri="{BB962C8B-B14F-4D97-AF65-F5344CB8AC3E}">
+        <p14:creationId xmlns:p14="http://schemas.microsoft.com/office/powerpoint/2010/main" val="1024086991"/>
+      </p:ext>
+    </p:extLst>
+  </p:cSld>
+  <p:clrMapOvr>
+    <a:masterClrMapping/>
+  </p:clrMapOvr>
+</p:notes>
+</file>
+
+<file path=ppt/notesSlides/notesSlide7.xml><?xml version="1.0" encoding="utf-8"?>
+<p:notes xmlns:a="http://schemas.openxmlformats.org/drawingml/2006/main" xmlns:r="http://schemas.openxmlformats.org/officeDocument/2006/relationships" xmlns:p="http://schemas.openxmlformats.org/presentationml/2006/main">
+  <p:cSld>
+    <p:spTree>
+      <p:nvGrpSpPr>
+        <p:cNvPr id="1" name=""/>
+        <p:cNvGrpSpPr/>
+        <p:nvPr/>
+      </p:nvGrpSpPr>
+      <p:grpSpPr>
+        <a:xfrm>
+          <a:off x="0" y="0"/>
+          <a:ext cx="0" cy="0"/>
+          <a:chOff x="0" y="0"/>
+          <a:chExt cx="0" cy="0"/>
+        </a:xfrm>
+      </p:grpSpPr>
+      <p:sp>
+        <p:nvSpPr>
+          <p:cNvPr id="2" name="Slide Image Placeholder 1"/>
+          <p:cNvSpPr>
+            <a:spLocks noGrp="1" noRot="1" noChangeAspect="1"/>
+          </p:cNvSpPr>
+          <p:nvPr>
+            <p:ph type="sldImg"/>
+          </p:nvPr>
+        </p:nvSpPr>
+        <p:spPr/>
+      </p:sp>
+      <p:sp>
+        <p:nvSpPr>
+          <p:cNvPr id="3" name="Notes Placeholder 2"/>
+          <p:cNvSpPr>
+            <a:spLocks noGrp="1"/>
+          </p:cNvSpPr>
+          <p:nvPr>
+            <p:ph type="body" idx="1"/>
+          </p:nvPr>
+        </p:nvSpPr>
+        <p:spPr/>
+        <p:txBody>
+          <a:bodyPr/>
+          <a:lstStyle/>
+          <a:p>
+            <a:r>
+              <a:rPr lang="en-US" dirty="0"/>
+              <a:t>Notas: Abrir com esta pergunta. Aguardar 2-3 respostas (vão citar: pintar highlight na textura, mapa especular, ajustar no motor). Confirmar que todas estavam certas — e então mostrar o problema no próximo slide: highlight embutido só funciona com a luz no ângulo certo.</a:t>
+            </a:r>
+            <a:endParaRPr lang="en-US" dirty="0"/>
+          </a:p>
+        </p:txBody>
+      </p:sp>
+      <p:sp>
+        <p:nvSpPr>
+          <p:cNvPr id="4" name="Slide Number Placeholder 3"/>
+          <p:cNvSpPr>
+            <a:spLocks noGrp="1"/>
+          </p:cNvSpPr>
+          <p:nvPr>
+            <p:ph type="sldNum" sz="quarter" idx="10"/>
+          </p:nvPr>
+        </p:nvSpPr>
+        <p:spPr/>
+        <p:txBody>
+          <a:bodyPr/>
+          <a:lstStyle/>
+          <a:p>
+            <a:fld id="{F7021451-1387-4CA6-816F-3879F97B5CBC}" type="slidenum">
+              <a:rPr lang="en-US"/>
+              <a:t>7</a:t>
+            </a:fld>
+            <a:endParaRPr lang="en-US"/>
+          </a:p>
+        </p:txBody>
+      </p:sp>
+    </p:spTree>
+    <p:extLst>
+      <p:ext uri="{BB962C8B-B14F-4D97-AF65-F5344CB8AC3E}">
+        <p14:creationId xmlns:p14="http://schemas.microsoft.com/office/powerpoint/2010/main" val="1024086991"/>
+      </p:ext>
+    </p:extLst>
+  </p:cSld>
+  <p:clrMapOvr>
+    <a:masterClrMapping/>
+  </p:clrMapOvr>
+</p:notes>
+</file>
+
+<file path=ppt/notesSlides/notesSlide8.xml><?xml version="1.0" encoding="utf-8"?>
+<p:notes xmlns:a="http://schemas.openxmlformats.org/drawingml/2006/main" xmlns:r="http://schemas.openxmlformats.org/officeDocument/2006/relationships" xmlns:p="http://schemas.openxmlformats.org/presentationml/2006/main">
+  <p:cSld>
+    <p:spTree>
+      <p:nvGrpSpPr>
+        <p:cNvPr id="1" name=""/>
+        <p:cNvGrpSpPr/>
+        <p:nvPr/>
+      </p:nvGrpSpPr>
+      <p:grpSpPr>
+        <a:xfrm>
+          <a:off x="0" y="0"/>
+          <a:ext cx="0" cy="0"/>
+          <a:chOff x="0" y="0"/>
+          <a:chExt cx="0" cy="0"/>
+        </a:xfrm>
+      </p:grpSpPr>
+      <p:sp>
+        <p:nvSpPr>
+          <p:cNvPr id="2" name="Slide Image Placeholder 1"/>
+          <p:cNvSpPr>
+            <a:spLocks noGrp="1" noRot="1" noChangeAspect="1"/>
+          </p:cNvSpPr>
+          <p:nvPr>
+            <p:ph type="sldImg"/>
+          </p:nvPr>
+        </p:nvSpPr>
+        <p:spPr/>
+      </p:sp>
+      <p:sp>
+        <p:nvSpPr>
+          <p:cNvPr id="3" name="Notes Placeholder 2"/>
+          <p:cNvSpPr>
+            <a:spLocks noGrp="1"/>
+          </p:cNvSpPr>
+          <p:nvPr>
+            <p:ph type="body" idx="1"/>
+          </p:nvPr>
+        </p:nvSpPr>
+        <p:spPr/>
+        <p:txBody>
+          <a:bodyPr/>
+          <a:lstStyle/>
+          <a:p>
+            <a:r>
+              <a:rPr lang="en-US" dirty="0"/>
               <a:t>Notas: Revelar após as respostas da turma. Fixar: antes de ~2013, o artista embutia luz, sombra e reflexo na textura difusa. Funcionava com câmera e iluminação fixas. Em qualquer outro ângulo, o material quebrava. Isso motiva a virada do PBR.
 [!FIGURA]
+Este arquivo ainda não existe em assets/ — precisa ser produzido antes da aula.
 Objetivo didático: mostrar visualmente por que o highlight pintado falha, motivando a necessidade do PBR.
 Arquivo sugerido: assets/highlight_embutido_vs_pbr.webp
 Descrição: mesma esfera em duas condições. À esquerda, esfera com highlight pintado na textura difusa, iluminada por um lado — parece correta. À direita, a MESMA esfera com a luz vinda do lado oposto — o brilho pintado aparece no lado errado, revelando o erro.
@@ -1608,7 +2409,7 @@
           <a:p>
             <a:fld id="{F7021451-1387-4CA6-816F-3879F97B5CBC}" type="slidenum">
               <a:rPr lang="en-US"/>
-              <a:t>4</a:t>
+              <a:t>8</a:t>
             </a:fld>
             <a:endParaRPr lang="en-US"/>
           </a:p>
@@ -1627,7 +2428,7 @@
 </p:notes>
 </file>
 
-<file path=ppt/notesSlides/notesSlide5.xml><?xml version="1.0" encoding="utf-8"?>
+<file path=ppt/notesSlides/notesSlide9.xml><?xml version="1.0" encoding="utf-8"?>
 <p:notes xmlns:a="http://schemas.openxmlformats.org/drawingml/2006/main" xmlns:r="http://schemas.openxmlformats.org/officeDocument/2006/relationships" xmlns:p="http://schemas.openxmlformats.org/presentationml/2006/main">
   <p:cSld>
     <p:spTree>
@@ -1674,358 +2475,6 @@
             <a:r>
               <a:rPr lang="en-US" dirty="0"/>
               <a:t>Notas: Este é o conceito-âncora da semana. Reforçar: o artista descreve propriedades físicas; o cálculo da aparência é do motor. É por isso que o mesmo material funciona numa masmorra escura e num deserto ensolarado sem retrabalho. Amarrar ao Projeto Integrador: o kit precisa ser coerente em qualquer cena.</a:t>
-            </a:r>
-            <a:endParaRPr lang="en-US" dirty="0"/>
-          </a:p>
-        </p:txBody>
-      </p:sp>
-      <p:sp>
-        <p:nvSpPr>
-          <p:cNvPr id="4" name="Slide Number Placeholder 3"/>
-          <p:cNvSpPr>
-            <a:spLocks noGrp="1"/>
-          </p:cNvSpPr>
-          <p:nvPr>
-            <p:ph type="sldNum" sz="quarter" idx="10"/>
-          </p:nvPr>
-        </p:nvSpPr>
-        <p:spPr/>
-        <p:txBody>
-          <a:bodyPr/>
-          <a:lstStyle/>
-          <a:p>
-            <a:fld id="{F7021451-1387-4CA6-816F-3879F97B5CBC}" type="slidenum">
-              <a:rPr lang="en-US"/>
-              <a:t>5</a:t>
-            </a:fld>
-            <a:endParaRPr lang="en-US"/>
-          </a:p>
-        </p:txBody>
-      </p:sp>
-    </p:spTree>
-    <p:extLst>
-      <p:ext uri="{BB962C8B-B14F-4D97-AF65-F5344CB8AC3E}">
-        <p14:creationId xmlns:p14="http://schemas.microsoft.com/office/powerpoint/2010/main" val="1024086991"/>
-      </p:ext>
-    </p:extLst>
-  </p:cSld>
-  <p:clrMapOvr>
-    <a:masterClrMapping/>
-  </p:clrMapOvr>
-</p:notes>
-</file>
-
-<file path=ppt/notesSlides/notesSlide6.xml><?xml version="1.0" encoding="utf-8"?>
-<p:notes xmlns:a="http://schemas.openxmlformats.org/drawingml/2006/main" xmlns:r="http://schemas.openxmlformats.org/officeDocument/2006/relationships" xmlns:p="http://schemas.openxmlformats.org/presentationml/2006/main">
-  <p:cSld>
-    <p:spTree>
-      <p:nvGrpSpPr>
-        <p:cNvPr id="1" name=""/>
-        <p:cNvGrpSpPr/>
-        <p:nvPr/>
-      </p:nvGrpSpPr>
-      <p:grpSpPr>
-        <a:xfrm>
-          <a:off x="0" y="0"/>
-          <a:ext cx="0" cy="0"/>
-          <a:chOff x="0" y="0"/>
-          <a:chExt cx="0" cy="0"/>
-        </a:xfrm>
-      </p:grpSpPr>
-      <p:sp>
-        <p:nvSpPr>
-          <p:cNvPr id="2" name="Slide Image Placeholder 1"/>
-          <p:cNvSpPr>
-            <a:spLocks noGrp="1" noRot="1" noChangeAspect="1"/>
-          </p:cNvSpPr>
-          <p:nvPr>
-            <p:ph type="sldImg"/>
-          </p:nvPr>
-        </p:nvSpPr>
-        <p:spPr/>
-      </p:sp>
-      <p:sp>
-        <p:nvSpPr>
-          <p:cNvPr id="3" name="Notes Placeholder 2"/>
-          <p:cNvSpPr>
-            <a:spLocks noGrp="1"/>
-          </p:cNvSpPr>
-          <p:nvPr>
-            <p:ph type="body" idx="1"/>
-          </p:nvPr>
-        </p:nvSpPr>
-        <p:spPr/>
-        <p:txBody>
-          <a:bodyPr/>
-          <a:lstStyle/>
-          <a:p>
-            <a:r>
-              <a:rPr lang="en-US" dirty="0"/>
-              <a:t>Notas: Não aprofundar Specular/Glossiness — citar apenas para situar. O importante é a decisão: adotamos Metallic/Roughness porque é o padrão dos motores modernos e o destino do pipeline é a Unity (Semana 16). Menos sujeito a erros físicos.</a:t>
-            </a:r>
-            <a:endParaRPr lang="en-US" dirty="0"/>
-          </a:p>
-        </p:txBody>
-      </p:sp>
-      <p:sp>
-        <p:nvSpPr>
-          <p:cNvPr id="4" name="Slide Number Placeholder 3"/>
-          <p:cNvSpPr>
-            <a:spLocks noGrp="1"/>
-          </p:cNvSpPr>
-          <p:nvPr>
-            <p:ph type="sldNum" sz="quarter" idx="10"/>
-          </p:nvPr>
-        </p:nvSpPr>
-        <p:spPr/>
-        <p:txBody>
-          <a:bodyPr/>
-          <a:lstStyle/>
-          <a:p>
-            <a:fld id="{F7021451-1387-4CA6-816F-3879F97B5CBC}" type="slidenum">
-              <a:rPr lang="en-US"/>
-              <a:t>6</a:t>
-            </a:fld>
-            <a:endParaRPr lang="en-US"/>
-          </a:p>
-        </p:txBody>
-      </p:sp>
-    </p:spTree>
-    <p:extLst>
-      <p:ext uri="{BB962C8B-B14F-4D97-AF65-F5344CB8AC3E}">
-        <p14:creationId xmlns:p14="http://schemas.microsoft.com/office/powerpoint/2010/main" val="1024086991"/>
-      </p:ext>
-    </p:extLst>
-  </p:cSld>
-  <p:clrMapOvr>
-    <a:masterClrMapping/>
-  </p:clrMapOvr>
-</p:notes>
-</file>
-
-<file path=ppt/notesSlides/notesSlide7.xml><?xml version="1.0" encoding="utf-8"?>
-<p:notes xmlns:a="http://schemas.openxmlformats.org/drawingml/2006/main" xmlns:r="http://schemas.openxmlformats.org/officeDocument/2006/relationships" xmlns:p="http://schemas.openxmlformats.org/presentationml/2006/main">
-  <p:cSld>
-    <p:spTree>
-      <p:nvGrpSpPr>
-        <p:cNvPr id="1" name=""/>
-        <p:cNvGrpSpPr/>
-        <p:nvPr/>
-      </p:nvGrpSpPr>
-      <p:grpSpPr>
-        <a:xfrm>
-          <a:off x="0" y="0"/>
-          <a:ext cx="0" cy="0"/>
-          <a:chOff x="0" y="0"/>
-          <a:chExt cx="0" cy="0"/>
-        </a:xfrm>
-      </p:grpSpPr>
-      <p:sp>
-        <p:nvSpPr>
-          <p:cNvPr id="2" name="Slide Image Placeholder 1"/>
-          <p:cNvSpPr>
-            <a:spLocks noGrp="1" noRot="1" noChangeAspect="1"/>
-          </p:cNvSpPr>
-          <p:nvPr>
-            <p:ph type="sldImg"/>
-          </p:nvPr>
-        </p:nvSpPr>
-        <p:spPr/>
-      </p:sp>
-      <p:sp>
-        <p:nvSpPr>
-          <p:cNvPr id="3" name="Notes Placeholder 2"/>
-          <p:cNvSpPr>
-            <a:spLocks noGrp="1"/>
-          </p:cNvSpPr>
-          <p:nvPr>
-            <p:ph type="body" idx="1"/>
-          </p:nvPr>
-        </p:nvSpPr>
-        <p:spPr/>
-        <p:txBody>
-          <a:bodyPr/>
-          <a:lstStyle/>
-          <a:p>
-            <a:r>
-              <a:rPr lang="en-US" dirty="0"/>
-              <a:t>Notas: Slide de mapa mental. Cada canal é detalhado nos próximos três slides. Escrever no quadro e manter durante toda a aula: "Roughness 0 = espelho | Roughness 1 = fosco". Antecipar que Metallic é binário e Roughness é contínuo.</a:t>
-            </a:r>
-            <a:endParaRPr lang="en-US" dirty="0"/>
-          </a:p>
-        </p:txBody>
-      </p:sp>
-      <p:sp>
-        <p:nvSpPr>
-          <p:cNvPr id="4" name="Slide Number Placeholder 3"/>
-          <p:cNvSpPr>
-            <a:spLocks noGrp="1"/>
-          </p:cNvSpPr>
-          <p:nvPr>
-            <p:ph type="sldNum" sz="quarter" idx="10"/>
-          </p:nvPr>
-        </p:nvSpPr>
-        <p:spPr/>
-        <p:txBody>
-          <a:bodyPr/>
-          <a:lstStyle/>
-          <a:p>
-            <a:fld id="{F7021451-1387-4CA6-816F-3879F97B5CBC}" type="slidenum">
-              <a:rPr lang="en-US"/>
-              <a:t>7</a:t>
-            </a:fld>
-            <a:endParaRPr lang="en-US"/>
-          </a:p>
-        </p:txBody>
-      </p:sp>
-    </p:spTree>
-    <p:extLst>
-      <p:ext uri="{BB962C8B-B14F-4D97-AF65-F5344CB8AC3E}">
-        <p14:creationId xmlns:p14="http://schemas.microsoft.com/office/powerpoint/2010/main" val="1024086991"/>
-      </p:ext>
-    </p:extLst>
-  </p:cSld>
-  <p:clrMapOvr>
-    <a:masterClrMapping/>
-  </p:clrMapOvr>
-</p:notes>
-</file>
-
-<file path=ppt/notesSlides/notesSlide8.xml><?xml version="1.0" encoding="utf-8"?>
-<p:notes xmlns:a="http://schemas.openxmlformats.org/drawingml/2006/main" xmlns:r="http://schemas.openxmlformats.org/officeDocument/2006/relationships" xmlns:p="http://schemas.openxmlformats.org/presentationml/2006/main">
-  <p:cSld>
-    <p:spTree>
-      <p:nvGrpSpPr>
-        <p:cNvPr id="1" name=""/>
-        <p:cNvGrpSpPr/>
-        <p:nvPr/>
-      </p:nvGrpSpPr>
-      <p:grpSpPr>
-        <a:xfrm>
-          <a:off x="0" y="0"/>
-          <a:ext cx="0" cy="0"/>
-          <a:chOff x="0" y="0"/>
-          <a:chExt cx="0" cy="0"/>
-        </a:xfrm>
-      </p:grpSpPr>
-      <p:sp>
-        <p:nvSpPr>
-          <p:cNvPr id="2" name="Slide Image Placeholder 1"/>
-          <p:cNvSpPr>
-            <a:spLocks noGrp="1" noRot="1" noChangeAspect="1"/>
-          </p:cNvSpPr>
-          <p:nvPr>
-            <p:ph type="sldImg"/>
-          </p:nvPr>
-        </p:nvSpPr>
-        <p:spPr/>
-      </p:sp>
-      <p:sp>
-        <p:nvSpPr>
-          <p:cNvPr id="3" name="Notes Placeholder 2"/>
-          <p:cNvSpPr>
-            <a:spLocks noGrp="1"/>
-          </p:cNvSpPr>
-          <p:nvPr>
-            <p:ph type="body" idx="1"/>
-          </p:nvPr>
-        </p:nvSpPr>
-        <p:spPr/>
-        <p:txBody>
-          <a:bodyPr/>
-          <a:lstStyle/>
-          <a:p>
-            <a:r>
-              <a:rPr lang="en-US" dirty="0"/>
-              <a:t>Notas: Analogia fotográfica útil (do plano): "Albedo é o material fotografado num dia nublado — iluminação difusa, sem sombra nem reflexo." Erro comum nº 3 da semana: Albedo extremo. Pedra real não reflete 95% da luz. Usar a referência do moodboard para ancorar o valor.</a:t>
-            </a:r>
-            <a:endParaRPr lang="en-US" dirty="0"/>
-          </a:p>
-        </p:txBody>
-      </p:sp>
-      <p:sp>
-        <p:nvSpPr>
-          <p:cNvPr id="4" name="Slide Number Placeholder 3"/>
-          <p:cNvSpPr>
-            <a:spLocks noGrp="1"/>
-          </p:cNvSpPr>
-          <p:nvPr>
-            <p:ph type="sldNum" sz="quarter" idx="10"/>
-          </p:nvPr>
-        </p:nvSpPr>
-        <p:spPr/>
-        <p:txBody>
-          <a:bodyPr/>
-          <a:lstStyle/>
-          <a:p>
-            <a:fld id="{F7021451-1387-4CA6-816F-3879F97B5CBC}" type="slidenum">
-              <a:rPr lang="en-US"/>
-              <a:t>8</a:t>
-            </a:fld>
-            <a:endParaRPr lang="en-US"/>
-          </a:p>
-        </p:txBody>
-      </p:sp>
-    </p:spTree>
-    <p:extLst>
-      <p:ext uri="{BB962C8B-B14F-4D97-AF65-F5344CB8AC3E}">
-        <p14:creationId xmlns:p14="http://schemas.microsoft.com/office/powerpoint/2010/main" val="1024086991"/>
-      </p:ext>
-    </p:extLst>
-  </p:cSld>
-  <p:clrMapOvr>
-    <a:masterClrMapping/>
-  </p:clrMapOvr>
-</p:notes>
-</file>
-
-<file path=ppt/notesSlides/notesSlide9.xml><?xml version="1.0" encoding="utf-8"?>
-<p:notes xmlns:a="http://schemas.openxmlformats.org/drawingml/2006/main" xmlns:r="http://schemas.openxmlformats.org/officeDocument/2006/relationships" xmlns:p="http://schemas.openxmlformats.org/presentationml/2006/main">
-  <p:cSld>
-    <p:spTree>
-      <p:nvGrpSpPr>
-        <p:cNvPr id="1" name=""/>
-        <p:cNvGrpSpPr/>
-        <p:nvPr/>
-      </p:nvGrpSpPr>
-      <p:grpSpPr>
-        <a:xfrm>
-          <a:off x="0" y="0"/>
-          <a:ext cx="0" cy="0"/>
-          <a:chOff x="0" y="0"/>
-          <a:chExt cx="0" cy="0"/>
-        </a:xfrm>
-      </p:grpSpPr>
-      <p:sp>
-        <p:nvSpPr>
-          <p:cNvPr id="2" name="Slide Image Placeholder 1"/>
-          <p:cNvSpPr>
-            <a:spLocks noGrp="1" noRot="1" noChangeAspect="1"/>
-          </p:cNvSpPr>
-          <p:nvPr>
-            <p:ph type="sldImg"/>
-          </p:nvPr>
-        </p:nvSpPr>
-        <p:spPr/>
-      </p:sp>
-      <p:sp>
-        <p:nvSpPr>
-          <p:cNvPr id="3" name="Notes Placeholder 2"/>
-          <p:cNvSpPr>
-            <a:spLocks noGrp="1"/>
-          </p:cNvSpPr>
-          <p:nvPr>
-            <p:ph type="body" idx="1"/>
-          </p:nvPr>
-        </p:nvSpPr>
-        <p:spPr/>
-        <p:txBody>
-          <a:bodyPr/>
-          <a:lstStyle/>
-          <a:p>
-            <a:r>
-              <a:rPr lang="en-US" dirty="0"/>
-              <a:t>Notas: Erro nº 1 da semana. O estudante acha que "deixar no meio" é seguro. Valores intermediários só se justificam em regiões de TRANSIÇÃO (ferrugem sobre metal, metal pintado). Estratégia de correção: mostrar ao vivo Metallic 0, 0.5 e 1 com o mesmo Roughness e perguntar "você já viu esse material na vida real?".</a:t>
             </a:r>
             <a:endParaRPr lang="en-US" dirty="0"/>
           </a:p>
@@ -2764,9 +3213,204 @@
 </p:sld>
 </file>
 
+<file path=ppt/slides/slide19.xml><?xml version="1.0" encoding="utf-8"?>
+<p:sld xmlns:a="http://schemas.openxmlformats.org/drawingml/2006/main" xmlns:r="http://schemas.openxmlformats.org/officeDocument/2006/relationships" xmlns:p="http://schemas.openxmlformats.org/presentationml/2006/main">
+  <p:cSld name="Slide 19">
+    <p:bg>
+      <p:bgPr>
+        <a:blipFill dpi="0" rotWithShape="1">
+          <a:blip r:embed="rId1">
+            <a:lum/>
+          </a:blip>
+          <a:srcRect/>
+          <a:stretch>
+            <a:fillRect/>
+          </a:stretch>
+        </a:blipFill>
+        <a:effectLst/>
+      </p:bgPr>
+    </p:bg>
+    <p:spTree>
+      <p:nvGrpSpPr>
+        <p:cNvPr id="1" name=""/>
+        <p:cNvGrpSpPr/>
+        <p:nvPr/>
+      </p:nvGrpSpPr>
+      <p:grpSpPr>
+        <a:xfrm>
+          <a:off x="0" y="0"/>
+          <a:ext cx="0" cy="0"/>
+          <a:chOff x="0" y="0"/>
+          <a:chExt cx="0" cy="0"/>
+        </a:xfrm>
+      </p:grpSpPr>
+    </p:spTree>
+  </p:cSld>
+  <p:clrMapOvr>
+    <a:masterClrMapping/>
+  </p:clrMapOvr>
+</p:sld>
+</file>
+
 <file path=ppt/slides/slide2.xml><?xml version="1.0" encoding="utf-8"?>
 <p:sld xmlns:a="http://schemas.openxmlformats.org/drawingml/2006/main" xmlns:r="http://schemas.openxmlformats.org/officeDocument/2006/relationships" xmlns:p="http://schemas.openxmlformats.org/presentationml/2006/main">
   <p:cSld name="Slide 2">
+    <p:bg>
+      <p:bgPr>
+        <a:blipFill dpi="0" rotWithShape="1">
+          <a:blip r:embed="rId1">
+            <a:lum/>
+          </a:blip>
+          <a:srcRect/>
+          <a:stretch>
+            <a:fillRect/>
+          </a:stretch>
+        </a:blipFill>
+        <a:effectLst/>
+      </p:bgPr>
+    </p:bg>
+    <p:spTree>
+      <p:nvGrpSpPr>
+        <p:cNvPr id="1" name=""/>
+        <p:cNvGrpSpPr/>
+        <p:nvPr/>
+      </p:nvGrpSpPr>
+      <p:grpSpPr>
+        <a:xfrm>
+          <a:off x="0" y="0"/>
+          <a:ext cx="0" cy="0"/>
+          <a:chOff x="0" y="0"/>
+          <a:chExt cx="0" cy="0"/>
+        </a:xfrm>
+      </p:grpSpPr>
+    </p:spTree>
+  </p:cSld>
+  <p:clrMapOvr>
+    <a:masterClrMapping/>
+  </p:clrMapOvr>
+</p:sld>
+</file>
+
+<file path=ppt/slides/slide20.xml><?xml version="1.0" encoding="utf-8"?>
+<p:sld xmlns:a="http://schemas.openxmlformats.org/drawingml/2006/main" xmlns:r="http://schemas.openxmlformats.org/officeDocument/2006/relationships" xmlns:p="http://schemas.openxmlformats.org/presentationml/2006/main">
+  <p:cSld name="Slide 20">
+    <p:bg>
+      <p:bgPr>
+        <a:blipFill dpi="0" rotWithShape="1">
+          <a:blip r:embed="rId1">
+            <a:lum/>
+          </a:blip>
+          <a:srcRect/>
+          <a:stretch>
+            <a:fillRect/>
+          </a:stretch>
+        </a:blipFill>
+        <a:effectLst/>
+      </p:bgPr>
+    </p:bg>
+    <p:spTree>
+      <p:nvGrpSpPr>
+        <p:cNvPr id="1" name=""/>
+        <p:cNvGrpSpPr/>
+        <p:nvPr/>
+      </p:nvGrpSpPr>
+      <p:grpSpPr>
+        <a:xfrm>
+          <a:off x="0" y="0"/>
+          <a:ext cx="0" cy="0"/>
+          <a:chOff x="0" y="0"/>
+          <a:chExt cx="0" cy="0"/>
+        </a:xfrm>
+      </p:grpSpPr>
+    </p:spTree>
+  </p:cSld>
+  <p:clrMapOvr>
+    <a:masterClrMapping/>
+  </p:clrMapOvr>
+</p:sld>
+</file>
+
+<file path=ppt/slides/slide21.xml><?xml version="1.0" encoding="utf-8"?>
+<p:sld xmlns:a="http://schemas.openxmlformats.org/drawingml/2006/main" xmlns:r="http://schemas.openxmlformats.org/officeDocument/2006/relationships" xmlns:p="http://schemas.openxmlformats.org/presentationml/2006/main">
+  <p:cSld name="Slide 21">
+    <p:bg>
+      <p:bgPr>
+        <a:blipFill dpi="0" rotWithShape="1">
+          <a:blip r:embed="rId1">
+            <a:lum/>
+          </a:blip>
+          <a:srcRect/>
+          <a:stretch>
+            <a:fillRect/>
+          </a:stretch>
+        </a:blipFill>
+        <a:effectLst/>
+      </p:bgPr>
+    </p:bg>
+    <p:spTree>
+      <p:nvGrpSpPr>
+        <p:cNvPr id="1" name=""/>
+        <p:cNvGrpSpPr/>
+        <p:nvPr/>
+      </p:nvGrpSpPr>
+      <p:grpSpPr>
+        <a:xfrm>
+          <a:off x="0" y="0"/>
+          <a:ext cx="0" cy="0"/>
+          <a:chOff x="0" y="0"/>
+          <a:chExt cx="0" cy="0"/>
+        </a:xfrm>
+      </p:grpSpPr>
+    </p:spTree>
+  </p:cSld>
+  <p:clrMapOvr>
+    <a:masterClrMapping/>
+  </p:clrMapOvr>
+</p:sld>
+</file>
+
+<file path=ppt/slides/slide22.xml><?xml version="1.0" encoding="utf-8"?>
+<p:sld xmlns:a="http://schemas.openxmlformats.org/drawingml/2006/main" xmlns:r="http://schemas.openxmlformats.org/officeDocument/2006/relationships" xmlns:p="http://schemas.openxmlformats.org/presentationml/2006/main">
+  <p:cSld name="Slide 22">
+    <p:bg>
+      <p:bgPr>
+        <a:blipFill dpi="0" rotWithShape="1">
+          <a:blip r:embed="rId1">
+            <a:lum/>
+          </a:blip>
+          <a:srcRect/>
+          <a:stretch>
+            <a:fillRect/>
+          </a:stretch>
+        </a:blipFill>
+        <a:effectLst/>
+      </p:bgPr>
+    </p:bg>
+    <p:spTree>
+      <p:nvGrpSpPr>
+        <p:cNvPr id="1" name=""/>
+        <p:cNvGrpSpPr/>
+        <p:nvPr/>
+      </p:nvGrpSpPr>
+      <p:grpSpPr>
+        <a:xfrm>
+          <a:off x="0" y="0"/>
+          <a:ext cx="0" cy="0"/>
+          <a:chOff x="0" y="0"/>
+          <a:chExt cx="0" cy="0"/>
+        </a:xfrm>
+      </p:grpSpPr>
+    </p:spTree>
+  </p:cSld>
+  <p:clrMapOvr>
+    <a:masterClrMapping/>
+  </p:clrMapOvr>
+</p:sld>
+</file>
+
+<file path=ppt/slides/slide23.xml><?xml version="1.0" encoding="utf-8"?>
+<p:sld xmlns:a="http://schemas.openxmlformats.org/drawingml/2006/main" xmlns:r="http://schemas.openxmlformats.org/officeDocument/2006/relationships" xmlns:p="http://schemas.openxmlformats.org/presentationml/2006/main">
+  <p:cSld name="Slide 23">
     <p:bg>
       <p:bgPr>
         <a:blipFill dpi="0" rotWithShape="1">

--- a/Slides/Semana 5/semana_5_slides.pptx
+++ b/Slides/Semana 5/semana_5_slides.pptx
@@ -524,7 +524,7 @@
           <a:p>
             <a:r>
               <a:rPr lang="en-US" dirty="0"/>
-              <a:t>Notas: Abertura da mini aula (20 min). Semana de transição: fecha a Unidade I revisando o UV a partir do feedback da CF1 e abre a Unidade II com a primeira aproximação a materiais PBR. NÃO há crítica formal nesta semana — é um encontro de ajuste e abertura, sem instrumento de avaliação. A CF1 (Semana 4) já avaliou C3 formalmente; a próxima crítica formal, a CF2, só acontece na Semana 8. Pela primeira vez os estudantes saem do UV Editor e entram no Shader Editor.</a:t>
+              <a:t>Notas: Marcar a dupla função da semana: fechar a Unidade I (revisão de UV com base no feedback da CF1) e abrir a Unidade II (primeira aproximação a materiais PBR). Não há crítica formal hoje — deixar isso claro logo na abertura para calibrar a expectativa da turma.</a:t>
             </a:r>
             <a:endParaRPr lang="en-US" dirty="0"/>
           </a:p>
@@ -612,7 +612,7 @@
           <a:p>
             <a:r>
               <a:rPr lang="en-US" dirty="0"/>
-              <a:t>Notas: Não aprofundar Specular/Glossiness — citar apenas para situar. O importante é a decisão: adotamos Metallic/Roughness porque é o padrão dos motores modernos e o destino do pipeline é a Unity (Semana 16). Menos sujeito a erros físicos.</a:t>
+              <a:t>Notas: Perguntar: "Você já viu um material assim na vida real? Se não, não deve existir no jogo." Identificar esse erro é prioridade na circulação de hoje.</a:t>
             </a:r>
             <a:endParaRPr lang="en-US" dirty="0"/>
           </a:p>
@@ -700,7 +700,7 @@
           <a:p>
             <a:r>
               <a:rPr lang="en-US" dirty="0"/>
-              <a:t>Notas: Slide de mapa mental. Cada canal é detalhado nos próximos três slides. Escrever no quadro e manter durante toda a aula: "Roughness 0 = espelho | Roughness 1 = fosco". Antecipar que Metallic é binário e Roughness é contínuo.</a:t>
+              <a:t>Notas: Escrever no quadro durante toda a aula: "Roughness 0 = espelho | Roughness 1 = fosco" — âncora para quem confunde Roughness com Glossiness (lógica invertida).</a:t>
             </a:r>
             <a:endParaRPr lang="en-US" dirty="0"/>
           </a:p>
@@ -788,7 +788,7 @@
           <a:p>
             <a:r>
               <a:rPr lang="en-US" dirty="0"/>
-              <a:t>Notas: Analogia fotográfica útil (do plano): "Albedo é o material fotografado num dia nublado — iluminação difusa, sem sombra nem reflexo." Erro comum observado nesta semana: Albedo extremo. Pedra real não reflete 95% da luz. Usar a referência do moodboard para ancorar o valor.</a:t>
+              <a:t>Notas: Mostrar as 5 referências e pedir que a turma estime os valores antes de revelar. O exercício de estimativa importa mais que os valores exatos — evitar memorização mecânica.</a:t>
             </a:r>
             <a:endParaRPr lang="en-US" dirty="0"/>
           </a:p>
@@ -876,7 +876,7 @@
           <a:p>
             <a:r>
               <a:rPr lang="en-US" dirty="0"/>
-              <a:t>Notas: Erro mais frequente observado na circulação. O estudante acha que "deixar no meio" é seguro. Valores intermediários só se justificam em regiões de TRANSIÇÃO (ferrugem sobre metal, metal pintado). Estratégia de correção: mostrar ao vivo Metallic 0, 0.5 e 1 com o mesmo Roughness e perguntar "você já viu esse material na vida real?".</a:t>
+              <a:t>Notas: Amarrar ao C4 (Materiais PBR) da Rubrica Mestre, observado (não formal) nesta semana.</a:t>
             </a:r>
             <a:endParaRPr lang="en-US" dirty="0"/>
           </a:p>
@@ -964,7 +964,7 @@
           <a:p>
             <a:r>
               <a:rPr lang="en-US" dirty="0"/>
-              <a:t>Notas: Ao contrário do Metallic, Roughness é genuinamente contínuo. Cuidado com o erro de intuição invertida: quem viu tutoriais antigos pode achar "mais roughness = mais brilho". No Metallic/Roughness é o oposto. Manter no quadro: Roughness 0 = espelho | Roughness 1 = fosco.</a:t>
+              <a:t>Notas: Fechar a mini aula amarrando os conceitos antes da demonstração.</a:t>
             </a:r>
             <a:endParaRPr lang="en-US" dirty="0"/>
           </a:p>
@@ -1052,7 +1052,12 @@
           <a:p>
             <a:r>
               <a:rPr lang="en-US" dirty="0"/>
-              <a:t>Notas: Este diagrama é o núcleo procedimental da semana. Repetir verbalmente no estúdio: "condutor ou dielétrico? qual a microtextura?". Cada material do kit deve passar por essas duas perguntas antes de qualquer valor ser digitado. Reaproveitado sem alteração — a lógica é a mesma independente de haver ou não crítica formal.</a:t>
+              <a:t>Notas: Transição para os 20 min de demonstração.
+[!FIGURA]
+Objetivo didático — Mostrar os quatro materiais de referência (metal polido, plástico brilhante, pedra áspera, madeira) lado a lado no Viewport renderizado, com a mesma HDRI neutra, evidenciando como Metallic e Roughness sozinhos definem a resposta à luz.
+Arquivo sugerido — assets/pbr_quatro_materiais.webp
+Descrição — Render do Viewport do Blender em modo Rendered, quatro esferas ou cubos lado a lado, cada um com um dos materiais de referência aplicado (metal polido, plástico brilhante, pedra áspera, madeira), sob a mesma HDRI de estúdio neutra.
+Como produzir — Capturar no Blender usando o arquivo de demonstração do professor (4 objetos, HDRI neutra tipo studio_small_09), um único enquadramento com os quatro objetos visíveis.</a:t>
             </a:r>
             <a:endParaRPr lang="en-US" dirty="0"/>
           </a:p>
@@ -1140,7 +1145,7 @@
           <a:p>
             <a:r>
               <a:rPr lang="en-US" dirty="0"/>
-              <a:t>Notas: Mostrar as 5 referências visuais preparadas e pedir que a turma ESTIME antes de revelar. O exercício de estimativa é mais importante que os valores finais — constrói intuição da escala 0-1. Deixar claro que os valores variam por subtipo (pedra polida vs. bruta) para evitar memorização mecânica.</a:t>
+              <a:t>Notas: Divisória entre a mini aula e o estúdio. Os slides a seguir ficam projetados durante a produção — servem de consigna e timebox visíveis, apresentados um a um conforme a etapa correspondente começa.</a:t>
             </a:r>
             <a:endParaRPr lang="en-US" dirty="0"/>
           </a:p>
@@ -1228,7 +1233,7 @@
           <a:p>
             <a:r>
               <a:rPr lang="en-US" dirty="0"/>
-              <a:t>Notas: Consigna do estúdio (Encontro 1, 50 min). Etapa 1: reabrir o Hero Asset com o feedback da CF1, reativar Stretch Overlay, aplicar Average Islands Scale/Pack Islands, salvar `[Nome]_HeroAsset_UV_Semana05.blend`. Etapa 2: criar 2-4 materiais no Principled BSDF com valores de referência real, aplicar um deles (valores planos) ao Hero Asset já com UV revisado, salvar `[Nome]_MateriaisPBR_Semana05.blend`. Circular perguntando: "O que a CF1 apontou nesse UV? Mostra onde corrigiu." e "Esse material é condutor ou dielétrico?".</a:t>
+              <a:t>Notas: Encontro 1. Circular perguntando: "O que a CF1 apontou como problema nesse UV? Mostra onde você corrigiu." Salvar como [Nome]_HeroAsset_UV_Semana05.blend.</a:t>
             </a:r>
             <a:endParaRPr lang="en-US" dirty="0"/>
           </a:p>
@@ -1316,7 +1321,7 @@
           <a:p>
             <a:r>
               <a:rPr lang="en-US" dirty="0"/>
-              <a:t>Notas: Quatro erros mais frequentes da semana, alinhados ao bloco de dificuldades do plano. Circular no estúdio caçando exatamente estes padrões. Para Roughness uniforme, usar a analogia do tato: "de olhos fechados, você distingue madeira de pedra pelo tato — o Roughness é o tato visual".</a:t>
+              <a:t>Notas: Circular com foco duplo: UV corrigido e plausibilidade física. Identificar quem usa Metallic 0.5 como padrão — corrigir individualmente.</a:t>
             </a:r>
             <a:endParaRPr lang="en-US" dirty="0"/>
           </a:p>
@@ -1404,7 +1409,7 @@
           <a:p>
             <a:r>
               <a:rPr lang="en-US" dirty="0"/>
-              <a:t>Notas: Contextualizar o valor profissional. PBR deixou de ser opcional na indústria há mais de uma década — hoje é o piso mínimo de qualquer pipeline de material em tempo real. A calibração contra referência real que a mini-aula ensinou hoje é observada informalmente e volta a ser cobrada formalmente na CF2 (Semana 8), já com textura real e dentro do 3D Coat.</a:t>
+              <a:t>Notas: Fechamento do Encontro 1. Garantir que todos saem com os dois arquivos salvos e nomeados corretamente antes do intervalo.</a:t>
             </a:r>
             <a:endParaRPr lang="en-US" dirty="0"/>
           </a:p>
@@ -1492,7 +1497,7 @@
           <a:p>
             <a:r>
               <a:rPr lang="en-US" dirty="0"/>
-              <a:t>Notas: Ler rápido. Os dois primeiros objetivos fecham a Unidade I (UV); os demais abrem a Unidade II (PBR). Não há nota nesta semana — o professor observa C1, C3 e C4 informalmente, alimentando o acompanhamento que será avaliado formalmente na CF2 (Semana 8). Não antecipar texturas seamless (Semana 6) nem Normal Map (Semana 7): o foco de hoje é o valor plano.</a:t>
+              <a:t>Notas: Recapitular em uma frase, sem reabrir o conteúdo técnico de seams/unwrap da Semana 4 — isso já foi ensinado. Só situar o fluxo e a ausência de nota formal hoje.</a:t>
             </a:r>
             <a:endParaRPr lang="en-US" dirty="0"/>
           </a:p>
@@ -1580,7 +1585,7 @@
           <a:p>
             <a:r>
               <a:rPr lang="en-US" dirty="0"/>
-              <a:t>Notas: Amarrar a mini aula. Cada item retorna na demonstração e no estúdio. Não reler tudo — apontar a conexão com a demo dos materiais no Principled BSDF. Não há crítica formal hoje: as observações de C1, C3 e C4 alimentam o acompanhamento informal até a CF2, na Semana 8.</a:t>
+              <a:t>Notas: Abertura do Encontro 2. Pergunta aberta para 2-3 voluntários: "Qual bloco foi mais difícil hoje, o UV ou o PBR? Por quê?" Sem registro formal — apenas aquece a reflexão para a CF2.</a:t>
             </a:r>
             <a:endParaRPr lang="en-US" dirty="0"/>
           </a:p>
@@ -1668,7 +1673,7 @@
           <a:p>
             <a:r>
               <a:rPr lang="en-US" dirty="0"/>
-              <a:t>Notas: Abertura do Encontro 2 (15 min). Roteiro: (5 min) mostrar exemplos projetados de UV e material bem calibrados; (5 min) nomear o erro mais comum observado (tipicamente Metallic 0.5, Albedo muito claro, Roughness igual); (5 min) pergunta aberta a 2-3 voluntários — "Qual bloco foi mais difícil hoje, o UV ou o PBR? Por quê?" — sem registro formal.</a:t>
+              <a:t>Notas: Perguntar: "Você ajustou o Metallic para 0 depois da circulação. O que mudou visualmente?" Reforçar a ligação entre ajuste técnico e percepção visual.</a:t>
             </a:r>
             <a:endParaRPr lang="en-US" dirty="0"/>
           </a:p>
@@ -1756,13 +1761,7 @@
           <a:p>
             <a:r>
               <a:rPr lang="en-US" dirty="0"/>
-              <a:t>Notas: Transição para a demonstração de 20 min (5 min de UV + 15 min de PBR). Layout dividido: Viewport Rendered com HDRI neutra à esquerda, Shader Editor à direita. Sequência: metal (Metallic 1, Rough 0.05) -&gt; plástico (Metallic 0) -&gt; pedra (Rough 0.85) -&gt; madeira. Mostrar Metallic 0/0.5/1 no plástico. Rotacionar a HDRI no fim para provar a consistência. Manter os dois arquivos de demonstração (UV e materiais) abertos durante o estúdio como âncora.
-[!FIGURA]
-Este arquivo ainda não existe em assets/ — precisa ser produzido antes da aula.
-Objetivo didático: dar à turma um alvo visual do resultado esperado e antecipar o layout de tela da demonstração.
-Arquivo sugerido: assets/demo_4_materiais_pbr.webp
-Descrição: captura do Blender com quatro esferas lado a lado em Viewport Rendered sob HDRI neutra — metal polido (reflexo nítido), plástico vermelho brilhante, pedra bege fosca e madeira marrom. Ao lado, o Shader Editor mostrando um Principled BSDF conectado ao Material Output.
-Como produzir: no Blender, montar layout dividido (Viewport Rendered + Shader Editor), criar 4 esferas com os materiais da tabela de referência, adicionar HDRI neutra (ex: studio_small_09 do Poly Haven) no World e capturar a tela com os 4 materiais visíveis.</a:t>
+              <a:t>Notas: Para quem terminar rápido: "Pensem em qual outro asset do kit já poderia receber um material de teste hoje, antecipando a Semana 6." Salvar como [Nome]_HeroAsset_PBR_Semana05.blend.</a:t>
             </a:r>
             <a:endParaRPr lang="en-US" dirty="0"/>
           </a:p>
@@ -1850,7 +1849,7 @@
           <a:p>
             <a:r>
               <a:rPr lang="en-US" dirty="0"/>
-              <a:t>Notas: Fechamento (10 min). Síntese técnica (2 min): "se a resposta for não, o material vai parecer falso, independentemente de quanto detalhe você pintar por cima." Reflexão de processo (3 min): perguntar a 2-3 voluntários qual material foi mais difícil de calibrar e por quê. Confirmação das entregas (2 min): Hero Asset com UV revisado, materiais PBR de teste (v1 e v2 pós-circulação), Hero Asset com material PBR aplicado, screenshots — recapitular nomenclatura esperada.</a:t>
+              <a:t>Notas: Fechamento (10 min): "A pergunta que vai guiar todo o resto do semestre é: esse valor corresponde a algo real? Se não, o material vai parecer falso, não importa quanto detalhe você pinte por cima." Ponte: na Semana 6 esses valores de Metallic/Roughness recebem textura real no canal Albedo.</a:t>
             </a:r>
             <a:endParaRPr lang="en-US" dirty="0"/>
           </a:p>
@@ -1938,7 +1937,7 @@
           <a:p>
             <a:r>
               <a:rPr lang="en-US" dirty="0"/>
-              <a:t>Notas: Parte 1 da mini aula (~8 min). Objetivo: relembrar Stretch Overlay, texel density e Pack Islands o suficiente para que os estudantes ajam sobre o feedback da CF1 sem precisar de uma aula nova. Abrir dizendo: "Vocês já viram tudo isso na Semana 4. Hoje não é aula nova de UV — é a correção do que a crítica formal apontou."</a:t>
+              <a:t>Notas: Os dois primeiros objetivos fecham a Unidade I (revisão técnica de UV); os três últimos abrem a Unidade II (PBR) e são o foco do restante do semestre.</a:t>
             </a:r>
             <a:endParaRPr lang="en-US" dirty="0"/>
           </a:p>
@@ -2026,7 +2025,7 @@
           <a:p>
             <a:r>
               <a:rPr lang="en-US" dirty="0"/>
-              <a:t>Notas: Revisão no quadro/projetor, não uma aula nova. Serve apenas para destravar a correção guiada pelo feedback já recebido. Estudantes que trabalharam em outros softwares podem confundir intuições — reforçar verbalmente a leitura das cores do Stretch Overlay.</a:t>
+              <a:t>Notas: "Vocês já viram tudo isso na Semana 4. Hoje não é aula nova de UV — é a correção do que a crítica formal apontou. Abram o feedback que receberam e localizem, no próprio arquivo, onde está o problema." Revisão rápida (~8 min), não uma aula nova.</a:t>
             </a:r>
             <a:endParaRPr lang="en-US" dirty="0"/>
           </a:p>
@@ -2114,9 +2113,7 @@
           <a:p>
             <a:r>
               <a:rPr lang="en-US" dirty="0"/>
-              <a:t>Notas: Slide conceitual de apoio à correção ao vivo (Demonstração Parte 1, ~5 min): abrir um arquivo de prática com distorção evidente, aplicar Average Islands Scale e Pack Islands, comparar antes/depois. "Isso é exatamente o que vocês vão fazer com o feedback da própria CF1 daqui a pouco."
-[!FIGURA]
-Não existe hoje um arquivo de imagem para este slide — mantido texto-somente. Se for produzida uma nova figura, um bom candidato é um par de capturas de Stretch Overlay lado a lado (antes da correção / depois da correção) do mesmo asset, para reforçar visualmente a comparação.</a:t>
+              <a:t>Notas: Deixar 2-3 respostas antes de nomear o conceito. Respostas típicas: "não sabe, o artista pinta assim" — é exatamente a ponte para o problema que o PBR resolve.</a:t>
             </a:r>
             <a:endParaRPr lang="en-US" dirty="0"/>
           </a:p>
@@ -2204,7 +2201,7 @@
           <a:p>
             <a:r>
               <a:rPr lang="en-US" dirty="0"/>
-              <a:t>Notas: Parte 2 da mini aula (~12 min). Objetivo: criar o entendimento de que PBR não é um estilo visual, mas um modelo matemático de como a luz se comporta ao tocar superfícies. O UV revisado agora é o endereço onde os mapas PBR das próximas semanas vão morar.</a:t>
+              <a:t>Notas: Perguntar: "Antes do PBR, como os artistas faziam um material brilhante parecer brilhante em qualquer luz?" Aguardar 2-3 respostas antes de revelar o problema.</a:t>
             </a:r>
             <a:endParaRPr lang="en-US" dirty="0"/>
           </a:p>
@@ -2292,7 +2289,7 @@
           <a:p>
             <a:r>
               <a:rPr lang="en-US" dirty="0"/>
-              <a:t>Notas: Abrir com esta pergunta. Aguardar 2-3 respostas (vão citar: pintar highlight na textura, mapa especular, ajustar no motor). Confirmar que todas estavam certas — e então mostrar o problema no próximo slide: highlight embutido só funciona com a luz no ângulo certo.</a:t>
+              <a:t>Notas: Esse é o ponto central da mini aula — reforçar antes de entrar nos dois workflows.</a:t>
             </a:r>
             <a:endParaRPr lang="en-US" dirty="0"/>
           </a:p>
@@ -2380,13 +2377,7 @@
           <a:p>
             <a:r>
               <a:rPr lang="en-US" dirty="0"/>
-              <a:t>Notas: Revelar após as respostas da turma. Fixar: antes de ~2013, o artista embutia luz, sombra e reflexo na textura difusa. Funcionava com câmera e iluminação fixas. Em qualquer outro ângulo, o material quebrava. Isso motiva a virada do PBR.
-[!FIGURA]
-Este arquivo ainda não existe em assets/ — precisa ser produzido antes da aula.
-Objetivo didático: mostrar visualmente por que o highlight pintado falha, motivando a necessidade do PBR.
-Arquivo sugerido: assets/highlight_embutido_vs_pbr.webp
-Descrição: mesma esfera em duas condições. À esquerda, esfera com highlight pintado na textura difusa, iluminada por um lado — parece correta. À direita, a MESMA esfera com a luz vinda do lado oposto — o brilho pintado aparece no lado errado, revelando o erro.
-Como produzir: no Blender, criar uma esfera com um material Emission/difuso contendo um highlight pintado no Albedo (feito no Krita). Renderizar com uma luz à direita e depois à esquerda, sem mudar a textura. Compor as duas capturas lado a lado no Krita com rótulos "luz certa / luz errada".</a:t>
+              <a:t>Notas: Não aprofundar Specular/Glossiness — é só contexto histórico. O que importa é fixar que todo o pipeline da disciplina (até a Unity) usa Metallic/Roughness.</a:t>
             </a:r>
             <a:endParaRPr lang="en-US" dirty="0"/>
           </a:p>
@@ -2474,7 +2465,7 @@
           <a:p>
             <a:r>
               <a:rPr lang="en-US" dirty="0"/>
-              <a:t>Notas: Este é o conceito-âncora da semana. Reforçar: o artista descreve propriedades físicas; o cálculo da aparência é do motor. É por isso que o mesmo material funciona numa masmorra escura e num deserto ensolarado sem retrabalho. Amarrar ao Projeto Integrador: o kit precisa ser coerente em qualquer cena.</a:t>
+              <a:t>Notas: Analogia útil: "Albedo é como você fotografaria o material num dia nublado, com luz difusa e neutra."</a:t>
             </a:r>
             <a:endParaRPr lang="en-US" dirty="0"/>
           </a:p>

--- a/Slides/Semana 5/semana_5_slides.pptx
+++ b/Slides/Semana 5/semana_5_slides.pptx
@@ -28,9 +28,11 @@
     <p:sldId id="276" r:id="rId22"/>
     <p:sldId id="277" r:id="rId23"/>
     <p:sldId id="278" r:id="rId24"/>
+    <p:sldId id="279" r:id="rId25"/>
+    <p:sldId id="280" r:id="rId26"/>
   </p:sldIdLst>
   <p:notesMasterIdLst>
-    <p:notesMasterId r:id="rId25"/>
+    <p:notesMasterId r:id="rId27"/>
   </p:notesMasterIdLst>
   <p:sldSz cx="12192000" cy="6858000"/>
   <p:notesSz cx="6858000" cy="12192000"/>
@@ -612,7 +614,7 @@
           <a:p>
             <a:r>
               <a:rPr lang="en-US" dirty="0"/>
-              <a:t>Notas: Perguntar: "Você já viu um material assim na vida real? Se não, não deve existir no jogo." Identificar esse erro é prioridade na circulação de hoje.</a:t>
+              <a:t>Notas: Não aprofundar Specular/Glossiness — é só contexto histórico. O que importa é fixar que todo o pipeline da disciplina (até a Unity) usa Metallic/Roughness.</a:t>
             </a:r>
             <a:endParaRPr lang="en-US" dirty="0"/>
           </a:p>
@@ -700,7 +702,7 @@
           <a:p>
             <a:r>
               <a:rPr lang="en-US" dirty="0"/>
-              <a:t>Notas: Escrever no quadro durante toda a aula: "Roughness 0 = espelho | Roughness 1 = fosco" — âncora para quem confunde Roughness com Glossiness (lógica invertida).</a:t>
+              <a:t>Notas: Analogia útil: "Albedo é como você fotografaria o material num dia nublado, com luz difusa e neutra."</a:t>
             </a:r>
             <a:endParaRPr lang="en-US" dirty="0"/>
           </a:p>
@@ -788,7 +790,7 @@
           <a:p>
             <a:r>
               <a:rPr lang="en-US" dirty="0"/>
-              <a:t>Notas: Mostrar as 5 referências e pedir que a turma estime os valores antes de revelar. O exercício de estimativa importa mais que os valores exatos — evitar memorização mecânica.</a:t>
+              <a:t>Notas: Perguntar: "Você já viu um material assim na vida real? Se não, não deve existir no jogo." Identificar esse erro é prioridade na circulação de hoje.</a:t>
             </a:r>
             <a:endParaRPr lang="en-US" dirty="0"/>
           </a:p>
@@ -876,7 +878,7 @@
           <a:p>
             <a:r>
               <a:rPr lang="en-US" dirty="0"/>
-              <a:t>Notas: Amarrar ao C4 (Materiais PBR) da Rubrica Mestre, observado (não formal) nesta semana.</a:t>
+              <a:t>Notas: Escrever no quadro durante toda a aula: "Roughness 0 = espelho | Roughness 1 = fosco" — âncora para quem confunde Roughness com Glossiness (lógica invertida).</a:t>
             </a:r>
             <a:endParaRPr lang="en-US" dirty="0"/>
           </a:p>
@@ -964,7 +966,7 @@
           <a:p>
             <a:r>
               <a:rPr lang="en-US" dirty="0"/>
-              <a:t>Notas: Fechar a mini aula amarrando os conceitos antes da demonstração.</a:t>
+              <a:t>Notas: Mostrar as 5 referências e pedir que a turma estime os valores antes de revelar. O exercício de estimativa importa mais que os valores exatos — evitar memorização mecânica.</a:t>
             </a:r>
             <a:endParaRPr lang="en-US" dirty="0"/>
           </a:p>
@@ -1007,6 +1009,182 @@
 </file>
 
 <file path=ppt/notesSlides/notesSlide15.xml><?xml version="1.0" encoding="utf-8"?>
+<p:notes xmlns:a="http://schemas.openxmlformats.org/drawingml/2006/main" xmlns:r="http://schemas.openxmlformats.org/officeDocument/2006/relationships" xmlns:p="http://schemas.openxmlformats.org/presentationml/2006/main">
+  <p:cSld>
+    <p:spTree>
+      <p:nvGrpSpPr>
+        <p:cNvPr id="1" name=""/>
+        <p:cNvGrpSpPr/>
+        <p:nvPr/>
+      </p:nvGrpSpPr>
+      <p:grpSpPr>
+        <a:xfrm>
+          <a:off x="0" y="0"/>
+          <a:ext cx="0" cy="0"/>
+          <a:chOff x="0" y="0"/>
+          <a:chExt cx="0" cy="0"/>
+        </a:xfrm>
+      </p:grpSpPr>
+      <p:sp>
+        <p:nvSpPr>
+          <p:cNvPr id="2" name="Slide Image Placeholder 1"/>
+          <p:cNvSpPr>
+            <a:spLocks noGrp="1" noRot="1" noChangeAspect="1"/>
+          </p:cNvSpPr>
+          <p:nvPr>
+            <p:ph type="sldImg"/>
+          </p:nvPr>
+        </p:nvSpPr>
+        <p:spPr/>
+      </p:sp>
+      <p:sp>
+        <p:nvSpPr>
+          <p:cNvPr id="3" name="Notes Placeholder 2"/>
+          <p:cNvSpPr>
+            <a:spLocks noGrp="1"/>
+          </p:cNvSpPr>
+          <p:nvPr>
+            <p:ph type="body" idx="1"/>
+          </p:nvPr>
+        </p:nvSpPr>
+        <p:spPr/>
+        <p:txBody>
+          <a:bodyPr/>
+          <a:lstStyle/>
+          <a:p>
+            <a:r>
+              <a:rPr lang="en-US" dirty="0"/>
+              <a:t>Notas: Amarrar ao C4 (Materiais PBR) da Rubrica Mestre, observado (não formal) nesta semana.</a:t>
+            </a:r>
+            <a:endParaRPr lang="en-US" dirty="0"/>
+          </a:p>
+        </p:txBody>
+      </p:sp>
+      <p:sp>
+        <p:nvSpPr>
+          <p:cNvPr id="4" name="Slide Number Placeholder 3"/>
+          <p:cNvSpPr>
+            <a:spLocks noGrp="1"/>
+          </p:cNvSpPr>
+          <p:nvPr>
+            <p:ph type="sldNum" sz="quarter" idx="10"/>
+          </p:nvPr>
+        </p:nvSpPr>
+        <p:spPr/>
+        <p:txBody>
+          <a:bodyPr/>
+          <a:lstStyle/>
+          <a:p>
+            <a:fld id="{F7021451-1387-4CA6-816F-3879F97B5CBC}" type="slidenum">
+              <a:rPr lang="en-US"/>
+              <a:t>15</a:t>
+            </a:fld>
+            <a:endParaRPr lang="en-US"/>
+          </a:p>
+        </p:txBody>
+      </p:sp>
+    </p:spTree>
+    <p:extLst>
+      <p:ext uri="{BB962C8B-B14F-4D97-AF65-F5344CB8AC3E}">
+        <p14:creationId xmlns:p14="http://schemas.microsoft.com/office/powerpoint/2010/main" val="1024086991"/>
+      </p:ext>
+    </p:extLst>
+  </p:cSld>
+  <p:clrMapOvr>
+    <a:masterClrMapping/>
+  </p:clrMapOvr>
+</p:notes>
+</file>
+
+<file path=ppt/notesSlides/notesSlide16.xml><?xml version="1.0" encoding="utf-8"?>
+<p:notes xmlns:a="http://schemas.openxmlformats.org/drawingml/2006/main" xmlns:r="http://schemas.openxmlformats.org/officeDocument/2006/relationships" xmlns:p="http://schemas.openxmlformats.org/presentationml/2006/main">
+  <p:cSld>
+    <p:spTree>
+      <p:nvGrpSpPr>
+        <p:cNvPr id="1" name=""/>
+        <p:cNvGrpSpPr/>
+        <p:nvPr/>
+      </p:nvGrpSpPr>
+      <p:grpSpPr>
+        <a:xfrm>
+          <a:off x="0" y="0"/>
+          <a:ext cx="0" cy="0"/>
+          <a:chOff x="0" y="0"/>
+          <a:chExt cx="0" cy="0"/>
+        </a:xfrm>
+      </p:grpSpPr>
+      <p:sp>
+        <p:nvSpPr>
+          <p:cNvPr id="2" name="Slide Image Placeholder 1"/>
+          <p:cNvSpPr>
+            <a:spLocks noGrp="1" noRot="1" noChangeAspect="1"/>
+          </p:cNvSpPr>
+          <p:nvPr>
+            <p:ph type="sldImg"/>
+          </p:nvPr>
+        </p:nvSpPr>
+        <p:spPr/>
+      </p:sp>
+      <p:sp>
+        <p:nvSpPr>
+          <p:cNvPr id="3" name="Notes Placeholder 2"/>
+          <p:cNvSpPr>
+            <a:spLocks noGrp="1"/>
+          </p:cNvSpPr>
+          <p:nvPr>
+            <p:ph type="body" idx="1"/>
+          </p:nvPr>
+        </p:nvSpPr>
+        <p:spPr/>
+        <p:txBody>
+          <a:bodyPr/>
+          <a:lstStyle/>
+          <a:p>
+            <a:r>
+              <a:rPr lang="en-US" dirty="0"/>
+              <a:t>Notas: Fechar a mini aula amarrando os conceitos antes da demonstração.</a:t>
+            </a:r>
+            <a:endParaRPr lang="en-US" dirty="0"/>
+          </a:p>
+        </p:txBody>
+      </p:sp>
+      <p:sp>
+        <p:nvSpPr>
+          <p:cNvPr id="4" name="Slide Number Placeholder 3"/>
+          <p:cNvSpPr>
+            <a:spLocks noGrp="1"/>
+          </p:cNvSpPr>
+          <p:nvPr>
+            <p:ph type="sldNum" sz="quarter" idx="10"/>
+          </p:nvPr>
+        </p:nvSpPr>
+        <p:spPr/>
+        <p:txBody>
+          <a:bodyPr/>
+          <a:lstStyle/>
+          <a:p>
+            <a:fld id="{F7021451-1387-4CA6-816F-3879F97B5CBC}" type="slidenum">
+              <a:rPr lang="en-US"/>
+              <a:t>16</a:t>
+            </a:fld>
+            <a:endParaRPr lang="en-US"/>
+          </a:p>
+        </p:txBody>
+      </p:sp>
+    </p:spTree>
+    <p:extLst>
+      <p:ext uri="{BB962C8B-B14F-4D97-AF65-F5344CB8AC3E}">
+        <p14:creationId xmlns:p14="http://schemas.microsoft.com/office/powerpoint/2010/main" val="1024086991"/>
+      </p:ext>
+    </p:extLst>
+  </p:cSld>
+  <p:clrMapOvr>
+    <a:masterClrMapping/>
+  </p:clrMapOvr>
+</p:notes>
+</file>
+
+<file path=ppt/notesSlides/notesSlide17.xml><?xml version="1.0" encoding="utf-8"?>
 <p:notes xmlns:a="http://schemas.openxmlformats.org/drawingml/2006/main" xmlns:r="http://schemas.openxmlformats.org/officeDocument/2006/relationships" xmlns:p="http://schemas.openxmlformats.org/presentationml/2006/main">
   <p:cSld>
     <p:spTree>
@@ -1080,7 +1258,7 @@
           <a:p>
             <a:fld id="{F7021451-1387-4CA6-816F-3879F97B5CBC}" type="slidenum">
               <a:rPr lang="en-US"/>
-              <a:t>15</a:t>
+              <a:t>17</a:t>
             </a:fld>
             <a:endParaRPr lang="en-US"/>
           </a:p>
@@ -1099,7 +1277,7 @@
 </p:notes>
 </file>
 
-<file path=ppt/notesSlides/notesSlide16.xml><?xml version="1.0" encoding="utf-8"?>
+<file path=ppt/notesSlides/notesSlide18.xml><?xml version="1.0" encoding="utf-8"?>
 <p:notes xmlns:a="http://schemas.openxmlformats.org/drawingml/2006/main" xmlns:r="http://schemas.openxmlformats.org/officeDocument/2006/relationships" xmlns:p="http://schemas.openxmlformats.org/presentationml/2006/main">
   <p:cSld>
     <p:spTree>
@@ -1168,7 +1346,7 @@
           <a:p>
             <a:fld id="{F7021451-1387-4CA6-816F-3879F97B5CBC}" type="slidenum">
               <a:rPr lang="en-US"/>
-              <a:t>16</a:t>
+              <a:t>18</a:t>
             </a:fld>
             <a:endParaRPr lang="en-US"/>
           </a:p>
@@ -1187,7 +1365,7 @@
 </p:notes>
 </file>
 
-<file path=ppt/notesSlides/notesSlide17.xml><?xml version="1.0" encoding="utf-8"?>
+<file path=ppt/notesSlides/notesSlide19.xml><?xml version="1.0" encoding="utf-8"?>
 <p:notes xmlns:a="http://schemas.openxmlformats.org/drawingml/2006/main" xmlns:r="http://schemas.openxmlformats.org/officeDocument/2006/relationships" xmlns:p="http://schemas.openxmlformats.org/presentationml/2006/main">
   <p:cSld>
     <p:spTree>
@@ -1256,7 +1434,7 @@
           <a:p>
             <a:fld id="{F7021451-1387-4CA6-816F-3879F97B5CBC}" type="slidenum">
               <a:rPr lang="en-US"/>
-              <a:t>17</a:t>
+              <a:t>19</a:t>
             </a:fld>
             <a:endParaRPr lang="en-US"/>
           </a:p>
@@ -1275,7 +1453,95 @@
 </p:notes>
 </file>
 
-<file path=ppt/notesSlides/notesSlide18.xml><?xml version="1.0" encoding="utf-8"?>
+<file path=ppt/notesSlides/notesSlide2.xml><?xml version="1.0" encoding="utf-8"?>
+<p:notes xmlns:a="http://schemas.openxmlformats.org/drawingml/2006/main" xmlns:r="http://schemas.openxmlformats.org/officeDocument/2006/relationships" xmlns:p="http://schemas.openxmlformats.org/presentationml/2006/main">
+  <p:cSld>
+    <p:spTree>
+      <p:nvGrpSpPr>
+        <p:cNvPr id="1" name=""/>
+        <p:cNvGrpSpPr/>
+        <p:nvPr/>
+      </p:nvGrpSpPr>
+      <p:grpSpPr>
+        <a:xfrm>
+          <a:off x="0" y="0"/>
+          <a:ext cx="0" cy="0"/>
+          <a:chOff x="0" y="0"/>
+          <a:chExt cx="0" cy="0"/>
+        </a:xfrm>
+      </p:grpSpPr>
+      <p:sp>
+        <p:nvSpPr>
+          <p:cNvPr id="2" name="Slide Image Placeholder 1"/>
+          <p:cNvSpPr>
+            <a:spLocks noGrp="1" noRot="1" noChangeAspect="1"/>
+          </p:cNvSpPr>
+          <p:nvPr>
+            <p:ph type="sldImg"/>
+          </p:nvPr>
+        </p:nvSpPr>
+        <p:spPr/>
+      </p:sp>
+      <p:sp>
+        <p:nvSpPr>
+          <p:cNvPr id="3" name="Notes Placeholder 2"/>
+          <p:cNvSpPr>
+            <a:spLocks noGrp="1"/>
+          </p:cNvSpPr>
+          <p:nvPr>
+            <p:ph type="body" idx="1"/>
+          </p:nvPr>
+        </p:nvSpPr>
+        <p:spPr/>
+        <p:txBody>
+          <a:bodyPr/>
+          <a:lstStyle/>
+          <a:p>
+            <a:r>
+              <a:rPr lang="en-US" dirty="0"/>
+              <a:t>Notas: Recapitular em uma frase, sem reabrir o conteúdo técnico de seams/unwrap da Semana 4 — isso já foi ensinado. Só situar o fluxo e a ausência de nota formal hoje.</a:t>
+            </a:r>
+            <a:endParaRPr lang="en-US" dirty="0"/>
+          </a:p>
+        </p:txBody>
+      </p:sp>
+      <p:sp>
+        <p:nvSpPr>
+          <p:cNvPr id="4" name="Slide Number Placeholder 3"/>
+          <p:cNvSpPr>
+            <a:spLocks noGrp="1"/>
+          </p:cNvSpPr>
+          <p:nvPr>
+            <p:ph type="sldNum" sz="quarter" idx="10"/>
+          </p:nvPr>
+        </p:nvSpPr>
+        <p:spPr/>
+        <p:txBody>
+          <a:bodyPr/>
+          <a:lstStyle/>
+          <a:p>
+            <a:fld id="{F7021451-1387-4CA6-816F-3879F97B5CBC}" type="slidenum">
+              <a:rPr lang="en-US"/>
+              <a:t>2</a:t>
+            </a:fld>
+            <a:endParaRPr lang="en-US"/>
+          </a:p>
+        </p:txBody>
+      </p:sp>
+    </p:spTree>
+    <p:extLst>
+      <p:ext uri="{BB962C8B-B14F-4D97-AF65-F5344CB8AC3E}">
+        <p14:creationId xmlns:p14="http://schemas.microsoft.com/office/powerpoint/2010/main" val="1024086991"/>
+      </p:ext>
+    </p:extLst>
+  </p:cSld>
+  <p:clrMapOvr>
+    <a:masterClrMapping/>
+  </p:clrMapOvr>
+</p:notes>
+</file>
+
+<file path=ppt/notesSlides/notesSlide20.xml><?xml version="1.0" encoding="utf-8"?>
 <p:notes xmlns:a="http://schemas.openxmlformats.org/drawingml/2006/main" xmlns:r="http://schemas.openxmlformats.org/officeDocument/2006/relationships" xmlns:p="http://schemas.openxmlformats.org/presentationml/2006/main">
   <p:cSld>
     <p:spTree>
@@ -1344,7 +1610,7 @@
           <a:p>
             <a:fld id="{F7021451-1387-4CA6-816F-3879F97B5CBC}" type="slidenum">
               <a:rPr lang="en-US"/>
-              <a:t>18</a:t>
+              <a:t>20</a:t>
             </a:fld>
             <a:endParaRPr lang="en-US"/>
           </a:p>
@@ -1363,7 +1629,7 @@
 </p:notes>
 </file>
 
-<file path=ppt/notesSlides/notesSlide19.xml><?xml version="1.0" encoding="utf-8"?>
+<file path=ppt/notesSlides/notesSlide21.xml><?xml version="1.0" encoding="utf-8"?>
 <p:notes xmlns:a="http://schemas.openxmlformats.org/drawingml/2006/main" xmlns:r="http://schemas.openxmlformats.org/officeDocument/2006/relationships" xmlns:p="http://schemas.openxmlformats.org/presentationml/2006/main">
   <p:cSld>
     <p:spTree>
@@ -1432,7 +1698,7 @@
           <a:p>
             <a:fld id="{F7021451-1387-4CA6-816F-3879F97B5CBC}" type="slidenum">
               <a:rPr lang="en-US"/>
-              <a:t>19</a:t>
+              <a:t>21</a:t>
             </a:fld>
             <a:endParaRPr lang="en-US"/>
           </a:p>
@@ -1451,7 +1717,7 @@
 </p:notes>
 </file>
 
-<file path=ppt/notesSlides/notesSlide2.xml><?xml version="1.0" encoding="utf-8"?>
+<file path=ppt/notesSlides/notesSlide22.xml><?xml version="1.0" encoding="utf-8"?>
 <p:notes xmlns:a="http://schemas.openxmlformats.org/drawingml/2006/main" xmlns:r="http://schemas.openxmlformats.org/officeDocument/2006/relationships" xmlns:p="http://schemas.openxmlformats.org/presentationml/2006/main">
   <p:cSld>
     <p:spTree>
@@ -1497,7 +1763,7 @@
           <a:p>
             <a:r>
               <a:rPr lang="en-US" dirty="0"/>
-              <a:t>Notas: Recapitular em uma frase, sem reabrir o conteúdo técnico de seams/unwrap da Semana 4 — isso já foi ensinado. Só situar o fluxo e a ausência de nota formal hoje.</a:t>
+              <a:t>Notas: Abertura do Encontro 2. Pergunta aberta para 2-3 voluntários: "Qual bloco foi mais difícil hoje, o UV ou o PBR? Por quê?" Sem registro formal — apenas aquece a reflexão para a CF2.</a:t>
             </a:r>
             <a:endParaRPr lang="en-US" dirty="0"/>
           </a:p>
@@ -1520,7 +1786,7 @@
           <a:p>
             <a:fld id="{F7021451-1387-4CA6-816F-3879F97B5CBC}" type="slidenum">
               <a:rPr lang="en-US"/>
-              <a:t>2</a:t>
+              <a:t>22</a:t>
             </a:fld>
             <a:endParaRPr lang="en-US"/>
           </a:p>
@@ -1539,7 +1805,7 @@
 </p:notes>
 </file>
 
-<file path=ppt/notesSlides/notesSlide20.xml><?xml version="1.0" encoding="utf-8"?>
+<file path=ppt/notesSlides/notesSlide23.xml><?xml version="1.0" encoding="utf-8"?>
 <p:notes xmlns:a="http://schemas.openxmlformats.org/drawingml/2006/main" xmlns:r="http://schemas.openxmlformats.org/officeDocument/2006/relationships" xmlns:p="http://schemas.openxmlformats.org/presentationml/2006/main">
   <p:cSld>
     <p:spTree>
@@ -1585,7 +1851,7 @@
           <a:p>
             <a:r>
               <a:rPr lang="en-US" dirty="0"/>
-              <a:t>Notas: Abertura do Encontro 2. Pergunta aberta para 2-3 voluntários: "Qual bloco foi mais difícil hoje, o UV ou o PBR? Por quê?" Sem registro formal — apenas aquece a reflexão para a CF2.</a:t>
+              <a:t>Notas: Perguntar: "Você ajustou o Metallic para 0 depois da circulação. O que mudou visualmente?" Reforçar a ligação entre ajuste técnico e percepção visual.</a:t>
             </a:r>
             <a:endParaRPr lang="en-US" dirty="0"/>
           </a:p>
@@ -1608,7 +1874,7 @@
           <a:p>
             <a:fld id="{F7021451-1387-4CA6-816F-3879F97B5CBC}" type="slidenum">
               <a:rPr lang="en-US"/>
-              <a:t>20</a:t>
+              <a:t>23</a:t>
             </a:fld>
             <a:endParaRPr lang="en-US"/>
           </a:p>
@@ -1627,7 +1893,7 @@
 </p:notes>
 </file>
 
-<file path=ppt/notesSlides/notesSlide21.xml><?xml version="1.0" encoding="utf-8"?>
+<file path=ppt/notesSlides/notesSlide24.xml><?xml version="1.0" encoding="utf-8"?>
 <p:notes xmlns:a="http://schemas.openxmlformats.org/drawingml/2006/main" xmlns:r="http://schemas.openxmlformats.org/officeDocument/2006/relationships" xmlns:p="http://schemas.openxmlformats.org/presentationml/2006/main">
   <p:cSld>
     <p:spTree>
@@ -1673,7 +1939,7 @@
           <a:p>
             <a:r>
               <a:rPr lang="en-US" dirty="0"/>
-              <a:t>Notas: Perguntar: "Você ajustou o Metallic para 0 depois da circulação. O que mudou visualmente?" Reforçar a ligação entre ajuste técnico e percepção visual.</a:t>
+              <a:t>Notas: Para quem terminar rápido: "Pensem em qual outro asset do kit já poderia receber um material de teste hoje, antecipando a Semana 6." Salvar como [Nome]_HeroAsset_PBR_Semana05.blend.</a:t>
             </a:r>
             <a:endParaRPr lang="en-US" dirty="0"/>
           </a:p>
@@ -1696,7 +1962,7 @@
           <a:p>
             <a:fld id="{F7021451-1387-4CA6-816F-3879F97B5CBC}" type="slidenum">
               <a:rPr lang="en-US"/>
-              <a:t>21</a:t>
+              <a:t>24</a:t>
             </a:fld>
             <a:endParaRPr lang="en-US"/>
           </a:p>
@@ -1715,7 +1981,7 @@
 </p:notes>
 </file>
 
-<file path=ppt/notesSlides/notesSlide22.xml><?xml version="1.0" encoding="utf-8"?>
+<file path=ppt/notesSlides/notesSlide25.xml><?xml version="1.0" encoding="utf-8"?>
 <p:notes xmlns:a="http://schemas.openxmlformats.org/drawingml/2006/main" xmlns:r="http://schemas.openxmlformats.org/officeDocument/2006/relationships" xmlns:p="http://schemas.openxmlformats.org/presentationml/2006/main">
   <p:cSld>
     <p:spTree>
@@ -1761,7 +2027,7 @@
           <a:p>
             <a:r>
               <a:rPr lang="en-US" dirty="0"/>
-              <a:t>Notas: Para quem terminar rápido: "Pensem em qual outro asset do kit já poderia receber um material de teste hoje, antecipando a Semana 6." Salvar como [Nome]_HeroAsset_PBR_Semana05.blend.</a:t>
+              <a:t>Notas: Fechamento (10 min): "A pergunta que vai guiar todo o resto do semestre é: esse valor corresponde a algo real? Se não, o material vai parecer falso, não importa quanto detalhe você pinte por cima." Ponte: na Semana 6 esses valores de Metallic/Roughness recebem textura real no canal Albedo.</a:t>
             </a:r>
             <a:endParaRPr lang="en-US" dirty="0"/>
           </a:p>
@@ -1784,7 +2050,7 @@
           <a:p>
             <a:fld id="{F7021451-1387-4CA6-816F-3879F97B5CBC}" type="slidenum">
               <a:rPr lang="en-US"/>
-              <a:t>22</a:t>
+              <a:t>25</a:t>
             </a:fld>
             <a:endParaRPr lang="en-US"/>
           </a:p>
@@ -1803,7 +2069,7 @@
 </p:notes>
 </file>
 
-<file path=ppt/notesSlides/notesSlide23.xml><?xml version="1.0" encoding="utf-8"?>
+<file path=ppt/notesSlides/notesSlide3.xml><?xml version="1.0" encoding="utf-8"?>
 <p:notes xmlns:a="http://schemas.openxmlformats.org/drawingml/2006/main" xmlns:r="http://schemas.openxmlformats.org/officeDocument/2006/relationships" xmlns:p="http://schemas.openxmlformats.org/presentationml/2006/main">
   <p:cSld>
     <p:spTree>
@@ -1849,7 +2115,7 @@
           <a:p>
             <a:r>
               <a:rPr lang="en-US" dirty="0"/>
-              <a:t>Notas: Fechamento (10 min): "A pergunta que vai guiar todo o resto do semestre é: esse valor corresponde a algo real? Se não, o material vai parecer falso, não importa quanto detalhe você pinte por cima." Ponte: na Semana 6 esses valores de Metallic/Roughness recebem textura real no canal Albedo.</a:t>
+              <a:t>Notas: Os dois primeiros objetivos fecham a Unidade I (revisão técnica de UV); os três últimos abrem a Unidade II (PBR) e são o foco do restante do semestre.</a:t>
             </a:r>
             <a:endParaRPr lang="en-US" dirty="0"/>
           </a:p>
@@ -1872,7 +2138,7 @@
           <a:p>
             <a:fld id="{F7021451-1387-4CA6-816F-3879F97B5CBC}" type="slidenum">
               <a:rPr lang="en-US"/>
-              <a:t>23</a:t>
+              <a:t>3</a:t>
             </a:fld>
             <a:endParaRPr lang="en-US"/>
           </a:p>
@@ -1891,7 +2157,7 @@
 </p:notes>
 </file>
 
-<file path=ppt/notesSlides/notesSlide3.xml><?xml version="1.0" encoding="utf-8"?>
+<file path=ppt/notesSlides/notesSlide4.xml><?xml version="1.0" encoding="utf-8"?>
 <p:notes xmlns:a="http://schemas.openxmlformats.org/drawingml/2006/main" xmlns:r="http://schemas.openxmlformats.org/officeDocument/2006/relationships" xmlns:p="http://schemas.openxmlformats.org/presentationml/2006/main">
   <p:cSld>
     <p:spTree>
@@ -1937,7 +2203,7 @@
           <a:p>
             <a:r>
               <a:rPr lang="en-US" dirty="0"/>
-              <a:t>Notas: Os dois primeiros objetivos fecham a Unidade I (revisão técnica de UV); os três últimos abrem a Unidade II (PBR) e são o foco do restante do semestre.</a:t>
+              <a:t>Notas: "Vocês já viram tudo isso na Semana 4. Hoje não é aula nova de UV — é a correção do que a crítica formal apontou. Abram o feedback que receberam e localizem, no próprio arquivo, onde está o problema." Revisão rápida, não uma aula nova. Texel density tem slide próprio a seguir — é o ponto que mais gera feedback recorrente na CF1.</a:t>
             </a:r>
             <a:endParaRPr lang="en-US" dirty="0"/>
           </a:p>
@@ -1960,7 +2226,7 @@
           <a:p>
             <a:fld id="{F7021451-1387-4CA6-816F-3879F97B5CBC}" type="slidenum">
               <a:rPr lang="en-US"/>
-              <a:t>3</a:t>
+              <a:t>4</a:t>
             </a:fld>
             <a:endParaRPr lang="en-US"/>
           </a:p>
@@ -1979,7 +2245,7 @@
 </p:notes>
 </file>
 
-<file path=ppt/notesSlides/notesSlide4.xml><?xml version="1.0" encoding="utf-8"?>
+<file path=ppt/notesSlides/notesSlide5.xml><?xml version="1.0" encoding="utf-8"?>
 <p:notes xmlns:a="http://schemas.openxmlformats.org/drawingml/2006/main" xmlns:r="http://schemas.openxmlformats.org/officeDocument/2006/relationships" xmlns:p="http://schemas.openxmlformats.org/presentationml/2006/main">
   <p:cSld>
     <p:spTree>
@@ -2025,7 +2291,7 @@
           <a:p>
             <a:r>
               <a:rPr lang="en-US" dirty="0"/>
-              <a:t>Notas: "Vocês já viram tudo isso na Semana 4. Hoje não é aula nova de UV — é a correção do que a crítica formal apontou. Abram o feedback que receberam e localizem, no próprio arquivo, onde está o problema." Revisão rápida (~8 min), não uma aula nova.</a:t>
+              <a:t>Notas: Esse é o ponto que mais aparece como feedback recorrente na CF1: um UV pode estar tecnicamente "limpo" (sem esticamento) e ainda ter islands em escalas de densidade muito diferentes entre si.</a:t>
             </a:r>
             <a:endParaRPr lang="en-US" dirty="0"/>
           </a:p>
@@ -2048,7 +2314,7 @@
           <a:p>
             <a:fld id="{F7021451-1387-4CA6-816F-3879F97B5CBC}" type="slidenum">
               <a:rPr lang="en-US"/>
-              <a:t>4</a:t>
+              <a:t>5</a:t>
             </a:fld>
             <a:endParaRPr lang="en-US"/>
           </a:p>
@@ -2067,7 +2333,95 @@
 </p:notes>
 </file>
 
-<file path=ppt/notesSlides/notesSlide5.xml><?xml version="1.0" encoding="utf-8"?>
+<file path=ppt/notesSlides/notesSlide6.xml><?xml version="1.0" encoding="utf-8"?>
+<p:notes xmlns:a="http://schemas.openxmlformats.org/drawingml/2006/main" xmlns:r="http://schemas.openxmlformats.org/officeDocument/2006/relationships" xmlns:p="http://schemas.openxmlformats.org/presentationml/2006/main">
+  <p:cSld>
+    <p:spTree>
+      <p:nvGrpSpPr>
+        <p:cNvPr id="1" name=""/>
+        <p:cNvGrpSpPr/>
+        <p:nvPr/>
+      </p:nvGrpSpPr>
+      <p:grpSpPr>
+        <a:xfrm>
+          <a:off x="0" y="0"/>
+          <a:ext cx="0" cy="0"/>
+          <a:chOff x="0" y="0"/>
+          <a:chExt cx="0" cy="0"/>
+        </a:xfrm>
+      </p:grpSpPr>
+      <p:sp>
+        <p:nvSpPr>
+          <p:cNvPr id="2" name="Slide Image Placeholder 1"/>
+          <p:cNvSpPr>
+            <a:spLocks noGrp="1" noRot="1" noChangeAspect="1"/>
+          </p:cNvSpPr>
+          <p:nvPr>
+            <p:ph type="sldImg"/>
+          </p:nvPr>
+        </p:nvSpPr>
+        <p:spPr/>
+      </p:sp>
+      <p:sp>
+        <p:nvSpPr>
+          <p:cNvPr id="3" name="Notes Placeholder 2"/>
+          <p:cNvSpPr>
+            <a:spLocks noGrp="1"/>
+          </p:cNvSpPr>
+          <p:nvPr>
+            <p:ph type="body" idx="1"/>
+          </p:nvPr>
+        </p:nvSpPr>
+        <p:spPr/>
+        <p:txBody>
+          <a:bodyPr/>
+          <a:lstStyle/>
+          <a:p>
+            <a:r>
+              <a:rPr lang="en-US" dirty="0"/>
+              <a:t>Notas: Reforçar a ordem das operações — é um erro comum rodar Pack Islands antes e ter que refazer o Average Islands Scale depois. Ferramenta de conferência visual: aplicar um checkerboard de escala uniforme (ex. 10cm x 10cm) e olhar se o tamanho aparente dos quadrados é o mesmo em todas as islands do objeto.</a:t>
+            </a:r>
+            <a:endParaRPr lang="en-US" dirty="0"/>
+          </a:p>
+        </p:txBody>
+      </p:sp>
+      <p:sp>
+        <p:nvSpPr>
+          <p:cNvPr id="4" name="Slide Number Placeholder 3"/>
+          <p:cNvSpPr>
+            <a:spLocks noGrp="1"/>
+          </p:cNvSpPr>
+          <p:nvPr>
+            <p:ph type="sldNum" sz="quarter" idx="10"/>
+          </p:nvPr>
+        </p:nvSpPr>
+        <p:spPr/>
+        <p:txBody>
+          <a:bodyPr/>
+          <a:lstStyle/>
+          <a:p>
+            <a:fld id="{F7021451-1387-4CA6-816F-3879F97B5CBC}" type="slidenum">
+              <a:rPr lang="en-US"/>
+              <a:t>6</a:t>
+            </a:fld>
+            <a:endParaRPr lang="en-US"/>
+          </a:p>
+        </p:txBody>
+      </p:sp>
+    </p:spTree>
+    <p:extLst>
+      <p:ext uri="{BB962C8B-B14F-4D97-AF65-F5344CB8AC3E}">
+        <p14:creationId xmlns:p14="http://schemas.microsoft.com/office/powerpoint/2010/main" val="1024086991"/>
+      </p:ext>
+    </p:extLst>
+  </p:cSld>
+  <p:clrMapOvr>
+    <a:masterClrMapping/>
+  </p:clrMapOvr>
+</p:notes>
+</file>
+
+<file path=ppt/notesSlides/notesSlide7.xml><?xml version="1.0" encoding="utf-8"?>
 <p:notes xmlns:a="http://schemas.openxmlformats.org/drawingml/2006/main" xmlns:r="http://schemas.openxmlformats.org/officeDocument/2006/relationships" xmlns:p="http://schemas.openxmlformats.org/presentationml/2006/main">
   <p:cSld>
     <p:spTree>
@@ -2136,7 +2490,7 @@
           <a:p>
             <a:fld id="{F7021451-1387-4CA6-816F-3879F97B5CBC}" type="slidenum">
               <a:rPr lang="en-US"/>
-              <a:t>5</a:t>
+              <a:t>7</a:t>
             </a:fld>
             <a:endParaRPr lang="en-US"/>
           </a:p>
@@ -2155,7 +2509,7 @@
 </p:notes>
 </file>
 
-<file path=ppt/notesSlides/notesSlide6.xml><?xml version="1.0" encoding="utf-8"?>
+<file path=ppt/notesSlides/notesSlide8.xml><?xml version="1.0" encoding="utf-8"?>
 <p:notes xmlns:a="http://schemas.openxmlformats.org/drawingml/2006/main" xmlns:r="http://schemas.openxmlformats.org/officeDocument/2006/relationships" xmlns:p="http://schemas.openxmlformats.org/presentationml/2006/main">
   <p:cSld>
     <p:spTree>
@@ -2224,7 +2578,7 @@
           <a:p>
             <a:fld id="{F7021451-1387-4CA6-816F-3879F97B5CBC}" type="slidenum">
               <a:rPr lang="en-US"/>
-              <a:t>6</a:t>
+              <a:t>8</a:t>
             </a:fld>
             <a:endParaRPr lang="en-US"/>
           </a:p>
@@ -2243,7 +2597,7 @@
 </p:notes>
 </file>
 
-<file path=ppt/notesSlides/notesSlide7.xml><?xml version="1.0" encoding="utf-8"?>
+<file path=ppt/notesSlides/notesSlide9.xml><?xml version="1.0" encoding="utf-8"?>
 <p:notes xmlns:a="http://schemas.openxmlformats.org/drawingml/2006/main" xmlns:r="http://schemas.openxmlformats.org/officeDocument/2006/relationships" xmlns:p="http://schemas.openxmlformats.org/presentationml/2006/main">
   <p:cSld>
     <p:spTree>
@@ -2290,182 +2644,6 @@
             <a:r>
               <a:rPr lang="en-US" dirty="0"/>
               <a:t>Notas: Esse é o ponto central da mini aula — reforçar antes de entrar nos dois workflows.</a:t>
-            </a:r>
-            <a:endParaRPr lang="en-US" dirty="0"/>
-          </a:p>
-        </p:txBody>
-      </p:sp>
-      <p:sp>
-        <p:nvSpPr>
-          <p:cNvPr id="4" name="Slide Number Placeholder 3"/>
-          <p:cNvSpPr>
-            <a:spLocks noGrp="1"/>
-          </p:cNvSpPr>
-          <p:nvPr>
-            <p:ph type="sldNum" sz="quarter" idx="10"/>
-          </p:nvPr>
-        </p:nvSpPr>
-        <p:spPr/>
-        <p:txBody>
-          <a:bodyPr/>
-          <a:lstStyle/>
-          <a:p>
-            <a:fld id="{F7021451-1387-4CA6-816F-3879F97B5CBC}" type="slidenum">
-              <a:rPr lang="en-US"/>
-              <a:t>7</a:t>
-            </a:fld>
-            <a:endParaRPr lang="en-US"/>
-          </a:p>
-        </p:txBody>
-      </p:sp>
-    </p:spTree>
-    <p:extLst>
-      <p:ext uri="{BB962C8B-B14F-4D97-AF65-F5344CB8AC3E}">
-        <p14:creationId xmlns:p14="http://schemas.microsoft.com/office/powerpoint/2010/main" val="1024086991"/>
-      </p:ext>
-    </p:extLst>
-  </p:cSld>
-  <p:clrMapOvr>
-    <a:masterClrMapping/>
-  </p:clrMapOvr>
-</p:notes>
-</file>
-
-<file path=ppt/notesSlides/notesSlide8.xml><?xml version="1.0" encoding="utf-8"?>
-<p:notes xmlns:a="http://schemas.openxmlformats.org/drawingml/2006/main" xmlns:r="http://schemas.openxmlformats.org/officeDocument/2006/relationships" xmlns:p="http://schemas.openxmlformats.org/presentationml/2006/main">
-  <p:cSld>
-    <p:spTree>
-      <p:nvGrpSpPr>
-        <p:cNvPr id="1" name=""/>
-        <p:cNvGrpSpPr/>
-        <p:nvPr/>
-      </p:nvGrpSpPr>
-      <p:grpSpPr>
-        <a:xfrm>
-          <a:off x="0" y="0"/>
-          <a:ext cx="0" cy="0"/>
-          <a:chOff x="0" y="0"/>
-          <a:chExt cx="0" cy="0"/>
-        </a:xfrm>
-      </p:grpSpPr>
-      <p:sp>
-        <p:nvSpPr>
-          <p:cNvPr id="2" name="Slide Image Placeholder 1"/>
-          <p:cNvSpPr>
-            <a:spLocks noGrp="1" noRot="1" noChangeAspect="1"/>
-          </p:cNvSpPr>
-          <p:nvPr>
-            <p:ph type="sldImg"/>
-          </p:nvPr>
-        </p:nvSpPr>
-        <p:spPr/>
-      </p:sp>
-      <p:sp>
-        <p:nvSpPr>
-          <p:cNvPr id="3" name="Notes Placeholder 2"/>
-          <p:cNvSpPr>
-            <a:spLocks noGrp="1"/>
-          </p:cNvSpPr>
-          <p:nvPr>
-            <p:ph type="body" idx="1"/>
-          </p:nvPr>
-        </p:nvSpPr>
-        <p:spPr/>
-        <p:txBody>
-          <a:bodyPr/>
-          <a:lstStyle/>
-          <a:p>
-            <a:r>
-              <a:rPr lang="en-US" dirty="0"/>
-              <a:t>Notas: Não aprofundar Specular/Glossiness — é só contexto histórico. O que importa é fixar que todo o pipeline da disciplina (até a Unity) usa Metallic/Roughness.</a:t>
-            </a:r>
-            <a:endParaRPr lang="en-US" dirty="0"/>
-          </a:p>
-        </p:txBody>
-      </p:sp>
-      <p:sp>
-        <p:nvSpPr>
-          <p:cNvPr id="4" name="Slide Number Placeholder 3"/>
-          <p:cNvSpPr>
-            <a:spLocks noGrp="1"/>
-          </p:cNvSpPr>
-          <p:nvPr>
-            <p:ph type="sldNum" sz="quarter" idx="10"/>
-          </p:nvPr>
-        </p:nvSpPr>
-        <p:spPr/>
-        <p:txBody>
-          <a:bodyPr/>
-          <a:lstStyle/>
-          <a:p>
-            <a:fld id="{F7021451-1387-4CA6-816F-3879F97B5CBC}" type="slidenum">
-              <a:rPr lang="en-US"/>
-              <a:t>8</a:t>
-            </a:fld>
-            <a:endParaRPr lang="en-US"/>
-          </a:p>
-        </p:txBody>
-      </p:sp>
-    </p:spTree>
-    <p:extLst>
-      <p:ext uri="{BB962C8B-B14F-4D97-AF65-F5344CB8AC3E}">
-        <p14:creationId xmlns:p14="http://schemas.microsoft.com/office/powerpoint/2010/main" val="1024086991"/>
-      </p:ext>
-    </p:extLst>
-  </p:cSld>
-  <p:clrMapOvr>
-    <a:masterClrMapping/>
-  </p:clrMapOvr>
-</p:notes>
-</file>
-
-<file path=ppt/notesSlides/notesSlide9.xml><?xml version="1.0" encoding="utf-8"?>
-<p:notes xmlns:a="http://schemas.openxmlformats.org/drawingml/2006/main" xmlns:r="http://schemas.openxmlformats.org/officeDocument/2006/relationships" xmlns:p="http://schemas.openxmlformats.org/presentationml/2006/main">
-  <p:cSld>
-    <p:spTree>
-      <p:nvGrpSpPr>
-        <p:cNvPr id="1" name=""/>
-        <p:cNvGrpSpPr/>
-        <p:nvPr/>
-      </p:nvGrpSpPr>
-      <p:grpSpPr>
-        <a:xfrm>
-          <a:off x="0" y="0"/>
-          <a:ext cx="0" cy="0"/>
-          <a:chOff x="0" y="0"/>
-          <a:chExt cx="0" cy="0"/>
-        </a:xfrm>
-      </p:grpSpPr>
-      <p:sp>
-        <p:nvSpPr>
-          <p:cNvPr id="2" name="Slide Image Placeholder 1"/>
-          <p:cNvSpPr>
-            <a:spLocks noGrp="1" noRot="1" noChangeAspect="1"/>
-          </p:cNvSpPr>
-          <p:nvPr>
-            <p:ph type="sldImg"/>
-          </p:nvPr>
-        </p:nvSpPr>
-        <p:spPr/>
-      </p:sp>
-      <p:sp>
-        <p:nvSpPr>
-          <p:cNvPr id="3" name="Notes Placeholder 2"/>
-          <p:cNvSpPr>
-            <a:spLocks noGrp="1"/>
-          </p:cNvSpPr>
-          <p:nvPr>
-            <p:ph type="body" idx="1"/>
-          </p:nvPr>
-        </p:nvSpPr>
-        <p:spPr/>
-        <p:txBody>
-          <a:bodyPr/>
-          <a:lstStyle/>
-          <a:p>
-            <a:r>
-              <a:rPr lang="en-US" dirty="0"/>
-              <a:t>Notas: Analogia útil: "Albedo é como você fotografaria o material num dia nublado, com luz difusa e neutra."</a:t>
             </a:r>
             <a:endParaRPr lang="en-US" dirty="0"/>
           </a:p>
@@ -3402,6 +3580,84 @@
 <file path=ppt/slides/slide23.xml><?xml version="1.0" encoding="utf-8"?>
 <p:sld xmlns:a="http://schemas.openxmlformats.org/drawingml/2006/main" xmlns:r="http://schemas.openxmlformats.org/officeDocument/2006/relationships" xmlns:p="http://schemas.openxmlformats.org/presentationml/2006/main">
   <p:cSld name="Slide 23">
+    <p:bg>
+      <p:bgPr>
+        <a:blipFill dpi="0" rotWithShape="1">
+          <a:blip r:embed="rId1">
+            <a:lum/>
+          </a:blip>
+          <a:srcRect/>
+          <a:stretch>
+            <a:fillRect/>
+          </a:stretch>
+        </a:blipFill>
+        <a:effectLst/>
+      </p:bgPr>
+    </p:bg>
+    <p:spTree>
+      <p:nvGrpSpPr>
+        <p:cNvPr id="1" name=""/>
+        <p:cNvGrpSpPr/>
+        <p:nvPr/>
+      </p:nvGrpSpPr>
+      <p:grpSpPr>
+        <a:xfrm>
+          <a:off x="0" y="0"/>
+          <a:ext cx="0" cy="0"/>
+          <a:chOff x="0" y="0"/>
+          <a:chExt cx="0" cy="0"/>
+        </a:xfrm>
+      </p:grpSpPr>
+    </p:spTree>
+  </p:cSld>
+  <p:clrMapOvr>
+    <a:masterClrMapping/>
+  </p:clrMapOvr>
+</p:sld>
+</file>
+
+<file path=ppt/slides/slide24.xml><?xml version="1.0" encoding="utf-8"?>
+<p:sld xmlns:a="http://schemas.openxmlformats.org/drawingml/2006/main" xmlns:r="http://schemas.openxmlformats.org/officeDocument/2006/relationships" xmlns:p="http://schemas.openxmlformats.org/presentationml/2006/main">
+  <p:cSld name="Slide 24">
+    <p:bg>
+      <p:bgPr>
+        <a:blipFill dpi="0" rotWithShape="1">
+          <a:blip r:embed="rId1">
+            <a:lum/>
+          </a:blip>
+          <a:srcRect/>
+          <a:stretch>
+            <a:fillRect/>
+          </a:stretch>
+        </a:blipFill>
+        <a:effectLst/>
+      </p:bgPr>
+    </p:bg>
+    <p:spTree>
+      <p:nvGrpSpPr>
+        <p:cNvPr id="1" name=""/>
+        <p:cNvGrpSpPr/>
+        <p:nvPr/>
+      </p:nvGrpSpPr>
+      <p:grpSpPr>
+        <a:xfrm>
+          <a:off x="0" y="0"/>
+          <a:ext cx="0" cy="0"/>
+          <a:chOff x="0" y="0"/>
+          <a:chExt cx="0" cy="0"/>
+        </a:xfrm>
+      </p:grpSpPr>
+    </p:spTree>
+  </p:cSld>
+  <p:clrMapOvr>
+    <a:masterClrMapping/>
+  </p:clrMapOvr>
+</p:sld>
+</file>
+
+<file path=ppt/slides/slide25.xml><?xml version="1.0" encoding="utf-8"?>
+<p:sld xmlns:a="http://schemas.openxmlformats.org/drawingml/2006/main" xmlns:r="http://schemas.openxmlformats.org/officeDocument/2006/relationships" xmlns:p="http://schemas.openxmlformats.org/presentationml/2006/main">
+  <p:cSld name="Slide 25">
     <p:bg>
       <p:bgPr>
         <a:blipFill dpi="0" rotWithShape="1">
